--- a/ai101/slides/week-14.pptx
+++ b/ai101/slides/week-14.pptx
@@ -3239,7 +3239,7 @@
                   <a:srgbClr val="01AEFD"/>
                 </a:solidFill>
               </a:rPr>
-              <a:t>Type this into script.js   -   line 189</a:t>
+              <a:t>Type this into script.js   -   line 190</a:t>
             </a:r>
           </a:p>
         </p:txBody>
@@ -3533,11 +3533,36 @@
             <a:r>
               <a:rPr sz="1300">
                 <a:solidFill>
+                  <a:srgbClr val="6D8C97"/>
+                </a:solidFill>
+                <a:latin typeface="Consolas"/>
+              </a:rPr>
+              <a:t>    addLine('problem', 'That is too long for one message - try under 500 characters.');</a:t>
+            </a:r>
+          </a:p>
+          <a:p>
+            <a:pPr>
+              <a:spcAft>
+                <a:spcPts val="0"/>
+              </a:spcAft>
+            </a:pPr>
+            <a:r>
+              <a:rPr sz="1300">
+                <a:solidFill>
+                  <a:srgbClr val="6D8C97"/>
+                </a:solidFill>
+                <a:latin typeface="Consolas"/>
+              </a:rPr>
+              <a:t> 190  </a:t>
+            </a:r>
+            <a:r>
+              <a:rPr sz="1300">
+                <a:solidFill>
                   <a:srgbClr val="7FE0A0"/>
                 </a:solidFill>
                 <a:latin typeface="Consolas"/>
               </a:rPr>
-              <a:t>    addLine('problem', 'That is too long for one message - try under 500 characters.');</a:t>
+              <a:t>    return;</a:t>
             </a:r>
           </a:p>
         </p:txBody>
@@ -3570,7 +3595,7 @@
                   <a:srgbClr val="DCECEF"/>
                 </a:solidFill>
               </a:rPr>
-              <a:t>Tell them kindly it is too long.</a:t>
+              <a:t>And stop before sending - do not waste the whole budget on one message.</a:t>
             </a:r>
           </a:p>
         </p:txBody>
@@ -3629,7 +3654,7 @@
                   <a:srgbClr val="01AEFD"/>
                 </a:solidFill>
               </a:rPr>
-              <a:t>Type this into script.js   -   line 190</a:t>
+              <a:t>Type this into script.js   -   line 191</a:t>
             </a:r>
           </a:p>
         </p:txBody>
@@ -3948,11 +3973,36 @@
             <a:r>
               <a:rPr sz="1300">
                 <a:solidFill>
+                  <a:srgbClr val="6D8C97"/>
+                </a:solidFill>
+                <a:latin typeface="Consolas"/>
+              </a:rPr>
+              <a:t>    return;</a:t>
+            </a:r>
+          </a:p>
+          <a:p>
+            <a:pPr>
+              <a:spcAft>
+                <a:spcPts val="0"/>
+              </a:spcAft>
+            </a:pPr>
+            <a:r>
+              <a:rPr sz="1300">
+                <a:solidFill>
+                  <a:srgbClr val="6D8C97"/>
+                </a:solidFill>
+                <a:latin typeface="Consolas"/>
+              </a:rPr>
+              <a:t> 191  </a:t>
+            </a:r>
+            <a:r>
+              <a:rPr sz="1300">
+                <a:solidFill>
                   <a:srgbClr val="7FE0A0"/>
                 </a:solidFill>
                 <a:latin typeface="Consolas"/>
               </a:rPr>
-              <a:t>    return;</a:t>
+              <a:t>  }</a:t>
             </a:r>
           </a:p>
         </p:txBody>
@@ -3985,7 +4035,7 @@
                   <a:srgbClr val="DCECEF"/>
                 </a:solidFill>
               </a:rPr>
-              <a:t>And stop before sending - do not waste the whole budget on one message.</a:t>
+              <a:t>Close the if.</a:t>
             </a:r>
           </a:p>
         </p:txBody>
@@ -4044,7 +4094,7 @@
                   <a:srgbClr val="01AEFD"/>
                 </a:solidFill>
               </a:rPr>
-              <a:t>Type this into script.js   -   line 191</a:t>
+              <a:t>All together in script.js</a:t>
             </a:r>
           </a:p>
         </p:txBody>
@@ -4088,7 +4138,7 @@
             <a:r>
               <a:rPr sz="1300">
                 <a:solidFill>
-                  <a:srgbClr val="6D8C97"/>
+                  <a:srgbClr val="7FE0A0"/>
                 </a:solidFill>
                 <a:latin typeface="Consolas"/>
               </a:rPr>
@@ -4113,7 +4163,7 @@
             <a:r>
               <a:rPr sz="1300">
                 <a:solidFill>
-                  <a:srgbClr val="6D8C97"/>
+                  <a:srgbClr val="7FE0A0"/>
                 </a:solidFill>
                 <a:latin typeface="Consolas"/>
               </a:rPr>
@@ -4138,7 +4188,7 @@
             <a:r>
               <a:rPr sz="1300">
                 <a:solidFill>
-                  <a:srgbClr val="6D8C97"/>
+                  <a:srgbClr val="7FE0A0"/>
                 </a:solidFill>
                 <a:latin typeface="Consolas"/>
               </a:rPr>
@@ -4163,7 +4213,7 @@
             <a:r>
               <a:rPr sz="1300">
                 <a:solidFill>
-                  <a:srgbClr val="6D8C97"/>
+                  <a:srgbClr val="7FE0A0"/>
                 </a:solidFill>
                 <a:latin typeface="Consolas"/>
               </a:rPr>
@@ -4188,7 +4238,7 @@
             <a:r>
               <a:rPr sz="1300">
                 <a:solidFill>
-                  <a:srgbClr val="6D8C97"/>
+                  <a:srgbClr val="7FE0A0"/>
                 </a:solidFill>
                 <a:latin typeface="Consolas"/>
               </a:rPr>
@@ -4213,7 +4263,7 @@
             <a:r>
               <a:rPr sz="1300">
                 <a:solidFill>
-                  <a:srgbClr val="6D8C97"/>
+                  <a:srgbClr val="7FE0A0"/>
                 </a:solidFill>
                 <a:latin typeface="Consolas"/>
               </a:rPr>
@@ -4238,7 +4288,7 @@
             <a:r>
               <a:rPr sz="1300">
                 <a:solidFill>
-                  <a:srgbClr val="6D8C97"/>
+                  <a:srgbClr val="7FE0A0"/>
                 </a:solidFill>
                 <a:latin typeface="Consolas"/>
               </a:rPr>
@@ -4263,7 +4313,7 @@
             <a:r>
               <a:rPr sz="1300">
                 <a:solidFill>
-                  <a:srgbClr val="6D8C97"/>
+                  <a:srgbClr val="7FE0A0"/>
                 </a:solidFill>
                 <a:latin typeface="Consolas"/>
               </a:rPr>
@@ -4288,7 +4338,7 @@
             <a:r>
               <a:rPr sz="1300">
                 <a:solidFill>
-                  <a:srgbClr val="6D8C97"/>
+                  <a:srgbClr val="7FE0A0"/>
                 </a:solidFill>
                 <a:latin typeface="Consolas"/>
               </a:rPr>
@@ -4313,7 +4363,7 @@
             <a:r>
               <a:rPr sz="1300">
                 <a:solidFill>
-                  <a:srgbClr val="6D8C97"/>
+                  <a:srgbClr val="7FE0A0"/>
                 </a:solidFill>
                 <a:latin typeface="Consolas"/>
               </a:rPr>
@@ -4338,7 +4388,7 @@
             <a:r>
               <a:rPr sz="1300">
                 <a:solidFill>
-                  <a:srgbClr val="6D8C97"/>
+                  <a:srgbClr val="7FE0A0"/>
                 </a:solidFill>
                 <a:latin typeface="Consolas"/>
               </a:rPr>
@@ -4363,7 +4413,7 @@
             <a:r>
               <a:rPr sz="1300">
                 <a:solidFill>
-                  <a:srgbClr val="6D8C97"/>
+                  <a:srgbClr val="7FE0A0"/>
                 </a:solidFill>
                 <a:latin typeface="Consolas"/>
               </a:rPr>
@@ -4393,6 +4443,631 @@
                 <a:latin typeface="Consolas"/>
               </a:rPr>
               <a:t>  }</a:t>
+            </a:r>
+          </a:p>
+          <a:p>
+            <a:pPr>
+              <a:spcAft>
+                <a:spcPts val="0"/>
+              </a:spcAft>
+            </a:pPr>
+            <a:r>
+              <a:rPr sz="1300">
+                <a:solidFill>
+                  <a:srgbClr val="6D8C97"/>
+                </a:solidFill>
+                <a:latin typeface="Consolas"/>
+              </a:rPr>
+              <a:t> 192  </a:t>
+            </a:r>
+            <a:r>
+              <a:rPr sz="1300">
+                <a:solidFill>
+                  <a:srgbClr val="7FE0A0"/>
+                </a:solidFill>
+                <a:latin typeface="Consolas"/>
+              </a:rPr>
+              <a:t> </a:t>
+            </a:r>
+          </a:p>
+          <a:p>
+            <a:pPr>
+              <a:spcAft>
+                <a:spcPts val="0"/>
+              </a:spcAft>
+            </a:pPr>
+            <a:r>
+              <a:rPr sz="1300">
+                <a:solidFill>
+                  <a:srgbClr val="6D8C97"/>
+                </a:solidFill>
+                <a:latin typeface="Consolas"/>
+              </a:rPr>
+              <a:t> 193  </a:t>
+            </a:r>
+            <a:r>
+              <a:rPr sz="1300">
+                <a:solidFill>
+                  <a:srgbClr val="7FE0A0"/>
+                </a:solidFill>
+                <a:latin typeface="Consolas"/>
+              </a:rPr>
+              <a:t>  promptBox.value = '';</a:t>
+            </a:r>
+          </a:p>
+          <a:p>
+            <a:pPr>
+              <a:spcAft>
+                <a:spcPts val="0"/>
+              </a:spcAft>
+            </a:pPr>
+            <a:r>
+              <a:rPr sz="1300">
+                <a:solidFill>
+                  <a:srgbClr val="6D8C97"/>
+                </a:solidFill>
+                <a:latin typeface="Consolas"/>
+              </a:rPr>
+              <a:t> 194  </a:t>
+            </a:r>
+            <a:r>
+              <a:rPr sz="1300">
+                <a:solidFill>
+                  <a:srgbClr val="7FE0A0"/>
+                </a:solidFill>
+                <a:latin typeface="Consolas"/>
+              </a:rPr>
+              <a:t>  addLine('you', text);</a:t>
+            </a:r>
+          </a:p>
+          <a:p>
+            <a:pPr>
+              <a:spcAft>
+                <a:spcPts val="0"/>
+              </a:spcAft>
+            </a:pPr>
+            <a:r>
+              <a:rPr sz="1300">
+                <a:solidFill>
+                  <a:srgbClr val="6D8C97"/>
+                </a:solidFill>
+                <a:latin typeface="Consolas"/>
+              </a:rPr>
+              <a:t> 195  </a:t>
+            </a:r>
+            <a:r>
+              <a:rPr sz="1300">
+                <a:solidFill>
+                  <a:srgbClr val="7FE0A0"/>
+                </a:solidFill>
+                <a:latin typeface="Consolas"/>
+              </a:rPr>
+              <a:t>  history.push({ role: 'user', content: text });</a:t>
+            </a:r>
+          </a:p>
+          <a:p>
+            <a:pPr>
+              <a:spcAft>
+                <a:spcPts val="0"/>
+              </a:spcAft>
+            </a:pPr>
+            <a:r>
+              <a:rPr sz="1300">
+                <a:solidFill>
+                  <a:srgbClr val="6D8C97"/>
+                </a:solidFill>
+                <a:latin typeface="Consolas"/>
+              </a:rPr>
+              <a:t> 196  </a:t>
+            </a:r>
+            <a:r>
+              <a:rPr sz="1300">
+                <a:solidFill>
+                  <a:srgbClr val="7FE0A0"/>
+                </a:solidFill>
+                <a:latin typeface="Consolas"/>
+              </a:rPr>
+              <a:t> </a:t>
+            </a:r>
+          </a:p>
+          <a:p>
+            <a:pPr>
+              <a:spcAft>
+                <a:spcPts val="0"/>
+              </a:spcAft>
+            </a:pPr>
+            <a:r>
+              <a:rPr sz="1300">
+                <a:solidFill>
+                  <a:srgbClr val="6D8C97"/>
+                </a:solidFill>
+                <a:latin typeface="Consolas"/>
+              </a:rPr>
+              <a:t> 197  </a:t>
+            </a:r>
+            <a:r>
+              <a:rPr sz="1300">
+                <a:solidFill>
+                  <a:srgbClr val="7FE0A0"/>
+                </a:solidFill>
+                <a:latin typeface="Consolas"/>
+              </a:rPr>
+              <a:t>  const bubble = addLine('bot', '');</a:t>
+            </a:r>
+          </a:p>
+          <a:p>
+            <a:pPr>
+              <a:spcAft>
+                <a:spcPts val="0"/>
+              </a:spcAft>
+            </a:pPr>
+            <a:r>
+              <a:rPr sz="1300">
+                <a:solidFill>
+                  <a:srgbClr val="6D8C97"/>
+                </a:solidFill>
+                <a:latin typeface="Consolas"/>
+              </a:rPr>
+              <a:t> 198  </a:t>
+            </a:r>
+            <a:r>
+              <a:rPr sz="1300">
+                <a:solidFill>
+                  <a:srgbClr val="7FE0A0"/>
+                </a:solidFill>
+                <a:latin typeface="Consolas"/>
+              </a:rPr>
+              <a:t>  bubble.classList.add('writing');   // week 11: blinking cursor while it types</a:t>
+            </a:r>
+          </a:p>
+          <a:p>
+            <a:pPr>
+              <a:spcAft>
+                <a:spcPts val="0"/>
+              </a:spcAft>
+            </a:pPr>
+            <a:r>
+              <a:rPr sz="1300">
+                <a:solidFill>
+                  <a:srgbClr val="6D8C97"/>
+                </a:solidFill>
+                <a:latin typeface="Consolas"/>
+              </a:rPr>
+              <a:t> 199  </a:t>
+            </a:r>
+            <a:r>
+              <a:rPr sz="1300">
+                <a:solidFill>
+                  <a:srgbClr val="7FE0A0"/>
+                </a:solidFill>
+                <a:latin typeface="Consolas"/>
+              </a:rPr>
+              <a:t>  try {</a:t>
+            </a:r>
+          </a:p>
+          <a:p>
+            <a:pPr>
+              <a:spcAft>
+                <a:spcPts val="0"/>
+              </a:spcAft>
+            </a:pPr>
+            <a:r>
+              <a:rPr sz="1300">
+                <a:solidFill>
+                  <a:srgbClr val="6D8C97"/>
+                </a:solidFill>
+                <a:latin typeface="Consolas"/>
+              </a:rPr>
+              <a:t> 200  </a:t>
+            </a:r>
+            <a:r>
+              <a:rPr sz="1300">
+                <a:solidFill>
+                  <a:srgbClr val="7FE0A0"/>
+                </a:solidFill>
+                <a:latin typeface="Consolas"/>
+              </a:rPr>
+              <a:t>    // The function we hand over runs on EVERY piece that arrives.</a:t>
+            </a:r>
+          </a:p>
+          <a:p>
+            <a:pPr>
+              <a:spcAft>
+                <a:spcPts val="0"/>
+              </a:spcAft>
+            </a:pPr>
+            <a:r>
+              <a:rPr sz="1300">
+                <a:solidFill>
+                  <a:srgbClr val="6D8C97"/>
+                </a:solidFill>
+                <a:latin typeface="Consolas"/>
+              </a:rPr>
+              <a:t> 201  </a:t>
+            </a:r>
+            <a:r>
+              <a:rPr sz="1300">
+                <a:solidFill>
+                  <a:srgbClr val="7FE0A0"/>
+                </a:solidFill>
+                <a:latin typeface="Consolas"/>
+              </a:rPr>
+              <a:t>    const reply = await askAI(function (soFar) {</a:t>
+            </a:r>
+          </a:p>
+          <a:p>
+            <a:pPr>
+              <a:spcAft>
+                <a:spcPts val="0"/>
+              </a:spcAft>
+            </a:pPr>
+            <a:r>
+              <a:rPr sz="1300">
+                <a:solidFill>
+                  <a:srgbClr val="6D8C97"/>
+                </a:solidFill>
+                <a:latin typeface="Consolas"/>
+              </a:rPr>
+              <a:t> 202  </a:t>
+            </a:r>
+            <a:r>
+              <a:rPr sz="1300">
+                <a:solidFill>
+                  <a:srgbClr val="7FE0A0"/>
+                </a:solidFill>
+                <a:latin typeface="Consolas"/>
+              </a:rPr>
+              <a:t>      bubble.textContent = soFar;</a:t>
+            </a:r>
+          </a:p>
+          <a:p>
+            <a:pPr>
+              <a:spcAft>
+                <a:spcPts val="0"/>
+              </a:spcAft>
+            </a:pPr>
+            <a:r>
+              <a:rPr sz="1300">
+                <a:solidFill>
+                  <a:srgbClr val="6D8C97"/>
+                </a:solidFill>
+                <a:latin typeface="Consolas"/>
+              </a:rPr>
+              <a:t> 203  </a:t>
+            </a:r>
+            <a:r>
+              <a:rPr sz="1300">
+                <a:solidFill>
+                  <a:srgbClr val="7FE0A0"/>
+                </a:solidFill>
+                <a:latin typeface="Consolas"/>
+              </a:rPr>
+              <a:t>      chat.scrollTop = chat.scrollHeight;</a:t>
+            </a:r>
+          </a:p>
+          <a:p>
+            <a:pPr>
+              <a:spcAft>
+                <a:spcPts val="0"/>
+              </a:spcAft>
+            </a:pPr>
+            <a:r>
+              <a:rPr sz="1300">
+                <a:solidFill>
+                  <a:srgbClr val="6D8C97"/>
+                </a:solidFill>
+                <a:latin typeface="Consolas"/>
+              </a:rPr>
+              <a:t> 204  </a:t>
+            </a:r>
+            <a:r>
+              <a:rPr sz="1300">
+                <a:solidFill>
+                  <a:srgbClr val="7FE0A0"/>
+                </a:solidFill>
+                <a:latin typeface="Consolas"/>
+              </a:rPr>
+              <a:t>    });</a:t>
+            </a:r>
+          </a:p>
+          <a:p>
+            <a:pPr>
+              <a:spcAft>
+                <a:spcPts val="0"/>
+              </a:spcAft>
+            </a:pPr>
+            <a:r>
+              <a:rPr sz="1300">
+                <a:solidFill>
+                  <a:srgbClr val="6D8C97"/>
+                </a:solidFill>
+                <a:latin typeface="Consolas"/>
+              </a:rPr>
+              <a:t> 205  </a:t>
+            </a:r>
+            <a:r>
+              <a:rPr sz="1300">
+                <a:solidFill>
+                  <a:srgbClr val="7FE0A0"/>
+                </a:solidFill>
+                <a:latin typeface="Consolas"/>
+              </a:rPr>
+              <a:t>    bubble.classList.remove('writing');</a:t>
+            </a:r>
+          </a:p>
+          <a:p>
+            <a:pPr>
+              <a:spcAft>
+                <a:spcPts val="0"/>
+              </a:spcAft>
+            </a:pPr>
+            <a:r>
+              <a:rPr sz="1300">
+                <a:solidFill>
+                  <a:srgbClr val="6D8C97"/>
+                </a:solidFill>
+                <a:latin typeface="Consolas"/>
+              </a:rPr>
+              <a:t> 206  </a:t>
+            </a:r>
+            <a:r>
+              <a:rPr sz="1300">
+                <a:solidFill>
+                  <a:srgbClr val="7FE0A0"/>
+                </a:solidFill>
+                <a:latin typeface="Consolas"/>
+              </a:rPr>
+              <a:t>    history.push({ role: 'assistant', content: reply });   // it said this too</a:t>
+            </a:r>
+          </a:p>
+          <a:p>
+            <a:pPr>
+              <a:spcAft>
+                <a:spcPts val="0"/>
+              </a:spcAft>
+            </a:pPr>
+            <a:r>
+              <a:rPr sz="1300">
+                <a:solidFill>
+                  <a:srgbClr val="6D8C97"/>
+                </a:solidFill>
+                <a:latin typeface="Consolas"/>
+              </a:rPr>
+              <a:t> 207  </a:t>
+            </a:r>
+            <a:r>
+              <a:rPr sz="1300">
+                <a:solidFill>
+                  <a:srgbClr val="7FE0A0"/>
+                </a:solidFill>
+                <a:latin typeface="Consolas"/>
+              </a:rPr>
+              <a:t>  } catch (problem) {</a:t>
+            </a:r>
+          </a:p>
+          <a:p>
+            <a:pPr>
+              <a:spcAft>
+                <a:spcPts val="0"/>
+              </a:spcAft>
+            </a:pPr>
+            <a:r>
+              <a:rPr sz="1300">
+                <a:solidFill>
+                  <a:srgbClr val="6D8C97"/>
+                </a:solidFill>
+                <a:latin typeface="Consolas"/>
+              </a:rPr>
+              <a:t> 208  </a:t>
+            </a:r>
+            <a:r>
+              <a:rPr sz="1300">
+                <a:solidFill>
+                  <a:srgbClr val="7FE0A0"/>
+                </a:solidFill>
+                <a:latin typeface="Consolas"/>
+              </a:rPr>
+              <a:t>    bubble.remove();</a:t>
+            </a:r>
+          </a:p>
+          <a:p>
+            <a:pPr>
+              <a:spcAft>
+                <a:spcPts val="0"/>
+              </a:spcAft>
+            </a:pPr>
+            <a:r>
+              <a:rPr sz="1300">
+                <a:solidFill>
+                  <a:srgbClr val="6D8C97"/>
+                </a:solidFill>
+                <a:latin typeface="Consolas"/>
+              </a:rPr>
+              <a:t> 209  </a:t>
+            </a:r>
+            <a:r>
+              <a:rPr sz="1300">
+                <a:solidFill>
+                  <a:srgbClr val="7FE0A0"/>
+                </a:solidFill>
+                <a:latin typeface="Consolas"/>
+              </a:rPr>
+              <a:t>    // 'Failed to fetch' means the request never arrived anywhere. That is</a:t>
+            </a:r>
+          </a:p>
+          <a:p>
+            <a:pPr>
+              <a:spcAft>
+                <a:spcPts val="0"/>
+              </a:spcAft>
+            </a:pPr>
+            <a:r>
+              <a:rPr sz="1300">
+                <a:solidFill>
+                  <a:srgbClr val="6D8C97"/>
+                </a:solidFill>
+                <a:latin typeface="Consolas"/>
+              </a:rPr>
+              <a:t> 210  </a:t>
+            </a:r>
+            <a:r>
+              <a:rPr sz="1300">
+                <a:solidFill>
+                  <a:srgbClr val="7FE0A0"/>
+                </a:solidFill>
+                <a:latin typeface="Consolas"/>
+              </a:rPr>
+              <a:t>    // the commonest real failure and the least helpful wording, so replace it.</a:t>
+            </a:r>
+          </a:p>
+          <a:p>
+            <a:pPr>
+              <a:spcAft>
+                <a:spcPts val="0"/>
+              </a:spcAft>
+            </a:pPr>
+            <a:r>
+              <a:rPr sz="1300">
+                <a:solidFill>
+                  <a:srgbClr val="6D8C97"/>
+                </a:solidFill>
+                <a:latin typeface="Consolas"/>
+              </a:rPr>
+              <a:t> 211  </a:t>
+            </a:r>
+            <a:r>
+              <a:rPr sz="1300">
+                <a:solidFill>
+                  <a:srgbClr val="7FE0A0"/>
+                </a:solidFill>
+                <a:latin typeface="Consolas"/>
+              </a:rPr>
+              <a:t>    const said = problem.message === 'Failed to fetch'</a:t>
+            </a:r>
+          </a:p>
+          <a:p>
+            <a:pPr>
+              <a:spcAft>
+                <a:spcPts val="0"/>
+              </a:spcAft>
+            </a:pPr>
+            <a:r>
+              <a:rPr sz="1300">
+                <a:solidFill>
+                  <a:srgbClr val="6D8C97"/>
+                </a:solidFill>
+                <a:latin typeface="Consolas"/>
+              </a:rPr>
+              <a:t> 212  </a:t>
+            </a:r>
+            <a:r>
+              <a:rPr sz="1300">
+                <a:solidFill>
+                  <a:srgbClr val="7FE0A0"/>
+                </a:solidFill>
+                <a:latin typeface="Consolas"/>
+              </a:rPr>
+              <a:t>      ? 'Could not reach the AI. Are you on the school network?'</a:t>
+            </a:r>
+          </a:p>
+          <a:p>
+            <a:pPr>
+              <a:spcAft>
+                <a:spcPts val="0"/>
+              </a:spcAft>
+            </a:pPr>
+            <a:r>
+              <a:rPr sz="1300">
+                <a:solidFill>
+                  <a:srgbClr val="6D8C97"/>
+                </a:solidFill>
+                <a:latin typeface="Consolas"/>
+              </a:rPr>
+              <a:t> 213  </a:t>
+            </a:r>
+            <a:r>
+              <a:rPr sz="1300">
+                <a:solidFill>
+                  <a:srgbClr val="7FE0A0"/>
+                </a:solidFill>
+                <a:latin typeface="Consolas"/>
+              </a:rPr>
+              <a:t>      : problem.message;</a:t>
+            </a:r>
+          </a:p>
+          <a:p>
+            <a:pPr>
+              <a:spcAft>
+                <a:spcPts val="0"/>
+              </a:spcAft>
+            </a:pPr>
+            <a:r>
+              <a:rPr sz="1300">
+                <a:solidFill>
+                  <a:srgbClr val="6D8C97"/>
+                </a:solidFill>
+                <a:latin typeface="Consolas"/>
+              </a:rPr>
+              <a:t> 214  </a:t>
+            </a:r>
+            <a:r>
+              <a:rPr sz="1300">
+                <a:solidFill>
+                  <a:srgbClr val="7FE0A0"/>
+                </a:solidFill>
+                <a:latin typeface="Consolas"/>
+              </a:rPr>
+              <a:t>    addLine('problem', said);</a:t>
+            </a:r>
+          </a:p>
+          <a:p>
+            <a:pPr>
+              <a:spcAft>
+                <a:spcPts val="0"/>
+              </a:spcAft>
+            </a:pPr>
+            <a:r>
+              <a:rPr sz="1300">
+                <a:solidFill>
+                  <a:srgbClr val="6D8C97"/>
+                </a:solidFill>
+                <a:latin typeface="Consolas"/>
+              </a:rPr>
+              <a:t> 215  </a:t>
+            </a:r>
+            <a:r>
+              <a:rPr sz="1300">
+                <a:solidFill>
+                  <a:srgbClr val="7FE0A0"/>
+                </a:solidFill>
+                <a:latin typeface="Consolas"/>
+              </a:rPr>
+              <a:t>  }</a:t>
+            </a:r>
+          </a:p>
+          <a:p>
+            <a:pPr>
+              <a:spcAft>
+                <a:spcPts val="0"/>
+              </a:spcAft>
+            </a:pPr>
+            <a:r>
+              <a:rPr sz="1300">
+                <a:solidFill>
+                  <a:srgbClr val="6D8C97"/>
+                </a:solidFill>
+                <a:latin typeface="Consolas"/>
+              </a:rPr>
+              <a:t> 216  </a:t>
+            </a:r>
+            <a:r>
+              <a:rPr sz="1300">
+                <a:solidFill>
+                  <a:srgbClr val="7FE0A0"/>
+                </a:solidFill>
+                <a:latin typeface="Consolas"/>
+              </a:rPr>
+              <a:t>});</a:t>
             </a:r>
           </a:p>
         </p:txBody>
@@ -4425,7 +5100,7 @@
                   <a:srgbClr val="DCECEF"/>
                 </a:solidFill>
               </a:rPr>
-              <a:t>Close the if.</a:t>
+              <a:t>That is the whole piece. Check yours looks the same before moving on.</a:t>
             </a:r>
           </a:p>
         </p:txBody>
@@ -4441,14 +5116,6 @@
 <file path=ppt/slides/slide13.xml><?xml version="1.0" encoding="utf-8"?>
 <p:sld xmlns:a="http://schemas.openxmlformats.org/drawingml/2006/main" xmlns:p="http://schemas.openxmlformats.org/presentationml/2006/main" xmlns:r="http://schemas.openxmlformats.org/officeDocument/2006/relationships">
   <p:cSld>
-    <p:bg>
-      <p:bgPr>
-        <a:solidFill>
-          <a:srgbClr val="102127"/>
-        </a:solidFill>
-        <a:effectLst/>
-      </p:bgPr>
-    </p:bg>
     <p:spTree>
       <p:nvGrpSpPr>
         <p:cNvPr id="1" name=""/>
@@ -4458,14 +5125,40 @@
       <p:grpSpPr/>
       <p:sp>
         <p:nvSpPr>
-          <p:cNvPr id="2" name="TextBox 1"/>
+          <p:cNvPr id="2" name="Title 1"/>
+          <p:cNvSpPr>
+            <a:spLocks noGrp="1"/>
+          </p:cNvSpPr>
+          <p:nvPr>
+            <p:ph type="title"/>
+          </p:nvPr>
+        </p:nvSpPr>
+        <p:spPr/>
+        <p:txBody>
+          <a:bodyPr/>
+          <a:lstStyle/>
+          <a:p>
+            <a:r>
+              <a:rPr sz="3800" b="1">
+                <a:solidFill>
+                  <a:srgbClr val="1F2A37"/>
+                </a:solidFill>
+              </a:rPr>
+              <a:t>Why refuse a message over 500 characters?</a:t>
+            </a:r>
+          </a:p>
+        </p:txBody>
+      </p:sp>
+      <p:sp>
+        <p:nvSpPr>
+          <p:cNvPr id="3" name="TextBox 2"/>
           <p:cNvSpPr txBox="1"/>
           <p:nvPr/>
         </p:nvSpPr>
         <p:spPr>
           <a:xfrm>
-            <a:off x="502920" y="274320"/>
-            <a:ext cx="11155680" cy="548640"/>
+            <a:off x="868680" y="502920"/>
+            <a:ext cx="5486400" cy="457200"/>
           </a:xfrm>
           <a:prstGeom prst="rect">
             <a:avLst/>
@@ -4479,26 +5172,26 @@
           <a:lstStyle/>
           <a:p>
             <a:r>
-              <a:rPr sz="2200" b="1">
+              <a:rPr sz="1500" b="1">
                 <a:solidFill>
                   <a:srgbClr val="01AEFD"/>
                 </a:solidFill>
               </a:rPr>
-              <a:t>All together in script.js</a:t>
-            </a:r>
-          </a:p>
-        </p:txBody>
-      </p:sp>
-      <p:sp>
-        <p:nvSpPr>
-          <p:cNvPr id="3" name="TextBox 2"/>
+              <a:t>QUICK CHECK</a:t>
+            </a:r>
+          </a:p>
+        </p:txBody>
+      </p:sp>
+      <p:sp>
+        <p:nvSpPr>
+          <p:cNvPr id="4" name="TextBox 3"/>
           <p:cNvSpPr txBox="1"/>
           <p:nvPr/>
         </p:nvSpPr>
         <p:spPr>
           <a:xfrm>
-            <a:off x="502920" y="960120"/>
-            <a:ext cx="11155680" cy="4297680"/>
+            <a:off x="822960" y="1828800"/>
+            <a:ext cx="10515600" cy="4206240"/>
           </a:xfrm>
           <a:prstGeom prst="rect">
             <a:avLst/>
@@ -4506,991 +5199,83 @@
           <a:noFill/>
         </p:spPr>
         <p:txBody>
-          <a:bodyPr wrap="none">
-            <a:spAutoFit/>
-          </a:bodyPr>
-          <a:lstStyle/>
-          <a:p>
-            <a:pPr>
-              <a:spcAft>
-                <a:spcPts val="0"/>
-              </a:spcAft>
-            </a:pPr>
-            <a:r>
-              <a:rPr sz="1300">
-                <a:solidFill>
-                  <a:srgbClr val="6D8C97"/>
-                </a:solidFill>
-                <a:latin typeface="Consolas"/>
-              </a:rPr>
-              <a:t> 179  </a:t>
-            </a:r>
-            <a:r>
-              <a:rPr sz="1300">
-                <a:solidFill>
-                  <a:srgbClr val="7FE0A0"/>
-                </a:solidFill>
-                <a:latin typeface="Consolas"/>
-              </a:rPr>
-              <a:t> </a:t>
-            </a:r>
-          </a:p>
-          <a:p>
-            <a:pPr>
-              <a:spcAft>
-                <a:spcPts val="0"/>
-              </a:spcAft>
-            </a:pPr>
-            <a:r>
-              <a:rPr sz="1300">
-                <a:solidFill>
-                  <a:srgbClr val="6D8C97"/>
-                </a:solidFill>
-                <a:latin typeface="Consolas"/>
-              </a:rPr>
-              <a:t> 180  </a:t>
-            </a:r>
-            <a:r>
-              <a:rPr sz="1300">
-                <a:solidFill>
-                  <a:srgbClr val="7FE0A0"/>
-                </a:solidFill>
-                <a:latin typeface="Consolas"/>
-              </a:rPr>
-              <a:t>// The browser calls this when the form is submitted.</a:t>
-            </a:r>
-          </a:p>
-          <a:p>
-            <a:pPr>
-              <a:spcAft>
-                <a:spcPts val="0"/>
-              </a:spcAft>
-            </a:pPr>
-            <a:r>
-              <a:rPr sz="1300">
-                <a:solidFill>
-                  <a:srgbClr val="6D8C97"/>
-                </a:solidFill>
-                <a:latin typeface="Consolas"/>
-              </a:rPr>
-              <a:t> 181  </a:t>
-            </a:r>
-            <a:r>
-              <a:rPr sz="1300">
-                <a:solidFill>
-                  <a:srgbClr val="7FE0A0"/>
-                </a:solidFill>
-                <a:latin typeface="Consolas"/>
-              </a:rPr>
-              <a:t>composer.addEventListener('submit', async function (event) {</a:t>
-            </a:r>
-          </a:p>
-          <a:p>
-            <a:pPr>
-              <a:spcAft>
-                <a:spcPts val="0"/>
-              </a:spcAft>
-            </a:pPr>
-            <a:r>
-              <a:rPr sz="1300">
-                <a:solidFill>
-                  <a:srgbClr val="6D8C97"/>
-                </a:solidFill>
-                <a:latin typeface="Consolas"/>
-              </a:rPr>
-              <a:t> 182  </a:t>
-            </a:r>
-            <a:r>
-              <a:rPr sz="1300">
-                <a:solidFill>
-                  <a:srgbClr val="7FE0A0"/>
-                </a:solidFill>
-                <a:latin typeface="Consolas"/>
-              </a:rPr>
-              <a:t>  event.preventDefault();</a:t>
-            </a:r>
-          </a:p>
-          <a:p>
-            <a:pPr>
-              <a:spcAft>
-                <a:spcPts val="0"/>
-              </a:spcAft>
-            </a:pPr>
-            <a:r>
-              <a:rPr sz="1300">
-                <a:solidFill>
-                  <a:srgbClr val="6D8C97"/>
-                </a:solidFill>
-                <a:latin typeface="Consolas"/>
-              </a:rPr>
-              <a:t> 183  </a:t>
-            </a:r>
-            <a:r>
-              <a:rPr sz="1300">
-                <a:solidFill>
-                  <a:srgbClr val="7FE0A0"/>
-                </a:solidFill>
-                <a:latin typeface="Consolas"/>
-              </a:rPr>
-              <a:t>  const text = promptBox.value.trim();</a:t>
-            </a:r>
-          </a:p>
-          <a:p>
-            <a:pPr>
-              <a:spcAft>
-                <a:spcPts val="0"/>
-              </a:spcAft>
-            </a:pPr>
-            <a:r>
-              <a:rPr sz="1300">
-                <a:solidFill>
-                  <a:srgbClr val="6D8C97"/>
-                </a:solidFill>
-                <a:latin typeface="Consolas"/>
-              </a:rPr>
-              <a:t> 184  </a:t>
-            </a:r>
-            <a:r>
-              <a:rPr sz="1300">
-                <a:solidFill>
-                  <a:srgbClr val="7FE0A0"/>
-                </a:solidFill>
-                <a:latin typeface="Consolas"/>
-              </a:rPr>
-              <a:t>  if (text === '') { return; }</a:t>
-            </a:r>
-          </a:p>
-          <a:p>
-            <a:pPr>
-              <a:spcAft>
-                <a:spcPts val="0"/>
-              </a:spcAft>
-            </a:pPr>
-            <a:r>
-              <a:rPr sz="1300">
-                <a:solidFill>
-                  <a:srgbClr val="6D8C97"/>
-                </a:solidFill>
-                <a:latin typeface="Consolas"/>
-              </a:rPr>
-              <a:t> 185  </a:t>
-            </a:r>
-            <a:r>
-              <a:rPr sz="1300">
-                <a:solidFill>
-                  <a:srgbClr val="7FE0A0"/>
-                </a:solidFill>
-                <a:latin typeface="Consolas"/>
-              </a:rPr>
-              <a:t> </a:t>
-            </a:r>
-          </a:p>
-          <a:p>
-            <a:pPr>
-              <a:spcAft>
-                <a:spcPts val="0"/>
-              </a:spcAft>
-            </a:pPr>
-            <a:r>
-              <a:rPr sz="1300">
-                <a:solidFill>
-                  <a:srgbClr val="6D8C97"/>
-                </a:solidFill>
-                <a:latin typeface="Consolas"/>
-              </a:rPr>
-              <a:t> 186  </a:t>
-            </a:r>
-            <a:r>
-              <a:rPr sz="1300">
-                <a:solidFill>
-                  <a:srgbClr val="7FE0A0"/>
-                </a:solidFill>
-                <a:latin typeface="Consolas"/>
-              </a:rPr>
-              <a:t>  // Week 14: never trust what a user types. A giant message wastes the</a:t>
-            </a:r>
-          </a:p>
-          <a:p>
-            <a:pPr>
-              <a:spcAft>
-                <a:spcPts val="0"/>
-              </a:spcAft>
-            </a:pPr>
-            <a:r>
-              <a:rPr sz="1300">
-                <a:solidFill>
-                  <a:srgbClr val="6D8C97"/>
-                </a:solidFill>
-                <a:latin typeface="Consolas"/>
-              </a:rPr>
-              <a:t> 187  </a:t>
-            </a:r>
-            <a:r>
-              <a:rPr sz="1300">
-                <a:solidFill>
-                  <a:srgbClr val="7FE0A0"/>
-                </a:solidFill>
-                <a:latin typeface="Consolas"/>
-              </a:rPr>
-              <a:t>  // whole conversation budget and gets the request refused for everyone.</a:t>
-            </a:r>
-          </a:p>
-          <a:p>
-            <a:pPr>
-              <a:spcAft>
-                <a:spcPts val="0"/>
-              </a:spcAft>
-            </a:pPr>
-            <a:r>
-              <a:rPr sz="1300">
-                <a:solidFill>
-                  <a:srgbClr val="6D8C97"/>
-                </a:solidFill>
-                <a:latin typeface="Consolas"/>
-              </a:rPr>
-              <a:t> 188  </a:t>
-            </a:r>
-            <a:r>
-              <a:rPr sz="1300">
-                <a:solidFill>
-                  <a:srgbClr val="7FE0A0"/>
-                </a:solidFill>
-                <a:latin typeface="Consolas"/>
-              </a:rPr>
-              <a:t>  if (text.length &gt; 500) {</a:t>
-            </a:r>
-          </a:p>
-          <a:p>
-            <a:pPr>
-              <a:spcAft>
-                <a:spcPts val="0"/>
-              </a:spcAft>
-            </a:pPr>
-            <a:r>
-              <a:rPr sz="1300">
-                <a:solidFill>
-                  <a:srgbClr val="6D8C97"/>
-                </a:solidFill>
-                <a:latin typeface="Consolas"/>
-              </a:rPr>
-              <a:t> 189  </a:t>
-            </a:r>
-            <a:r>
-              <a:rPr sz="1300">
-                <a:solidFill>
-                  <a:srgbClr val="7FE0A0"/>
-                </a:solidFill>
-                <a:latin typeface="Consolas"/>
-              </a:rPr>
-              <a:t>    addLine('problem', 'That is too long for one message - try under 500 characters.');</a:t>
-            </a:r>
-          </a:p>
-          <a:p>
-            <a:pPr>
-              <a:spcAft>
-                <a:spcPts val="0"/>
-              </a:spcAft>
-            </a:pPr>
-            <a:r>
-              <a:rPr sz="1300">
-                <a:solidFill>
-                  <a:srgbClr val="6D8C97"/>
-                </a:solidFill>
-                <a:latin typeface="Consolas"/>
-              </a:rPr>
-              <a:t> 190  </a:t>
-            </a:r>
-            <a:r>
-              <a:rPr sz="1300">
-                <a:solidFill>
-                  <a:srgbClr val="7FE0A0"/>
-                </a:solidFill>
-                <a:latin typeface="Consolas"/>
-              </a:rPr>
-              <a:t>    return;</a:t>
-            </a:r>
-          </a:p>
-          <a:p>
-            <a:pPr>
-              <a:spcAft>
-                <a:spcPts val="0"/>
-              </a:spcAft>
-            </a:pPr>
-            <a:r>
-              <a:rPr sz="1300">
-                <a:solidFill>
-                  <a:srgbClr val="6D8C97"/>
-                </a:solidFill>
-                <a:latin typeface="Consolas"/>
-              </a:rPr>
-              <a:t> 191  </a:t>
-            </a:r>
-            <a:r>
-              <a:rPr sz="1300">
-                <a:solidFill>
-                  <a:srgbClr val="7FE0A0"/>
-                </a:solidFill>
-                <a:latin typeface="Consolas"/>
-              </a:rPr>
-              <a:t>  }</a:t>
-            </a:r>
-          </a:p>
-          <a:p>
-            <a:pPr>
-              <a:spcAft>
-                <a:spcPts val="0"/>
-              </a:spcAft>
-            </a:pPr>
-            <a:r>
-              <a:rPr sz="1300">
-                <a:solidFill>
-                  <a:srgbClr val="6D8C97"/>
-                </a:solidFill>
-                <a:latin typeface="Consolas"/>
-              </a:rPr>
-              <a:t> 192  </a:t>
-            </a:r>
-            <a:r>
-              <a:rPr sz="1300">
-                <a:solidFill>
-                  <a:srgbClr val="7FE0A0"/>
-                </a:solidFill>
-                <a:latin typeface="Consolas"/>
-              </a:rPr>
-              <a:t> </a:t>
-            </a:r>
-          </a:p>
-          <a:p>
-            <a:pPr>
-              <a:spcAft>
-                <a:spcPts val="0"/>
-              </a:spcAft>
-            </a:pPr>
-            <a:r>
-              <a:rPr sz="1300">
-                <a:solidFill>
-                  <a:srgbClr val="6D8C97"/>
-                </a:solidFill>
-                <a:latin typeface="Consolas"/>
-              </a:rPr>
-              <a:t> 193  </a:t>
-            </a:r>
-            <a:r>
-              <a:rPr sz="1300">
-                <a:solidFill>
-                  <a:srgbClr val="7FE0A0"/>
-                </a:solidFill>
-                <a:latin typeface="Consolas"/>
-              </a:rPr>
-              <a:t>  promptBox.value = '';</a:t>
-            </a:r>
-          </a:p>
-          <a:p>
-            <a:pPr>
-              <a:spcAft>
-                <a:spcPts val="0"/>
-              </a:spcAft>
-            </a:pPr>
-            <a:r>
-              <a:rPr sz="1300">
-                <a:solidFill>
-                  <a:srgbClr val="6D8C97"/>
-                </a:solidFill>
-                <a:latin typeface="Consolas"/>
-              </a:rPr>
-              <a:t> 194  </a:t>
-            </a:r>
-            <a:r>
-              <a:rPr sz="1300">
-                <a:solidFill>
-                  <a:srgbClr val="7FE0A0"/>
-                </a:solidFill>
-                <a:latin typeface="Consolas"/>
-              </a:rPr>
-              <a:t>  addLine('you', text);</a:t>
-            </a:r>
-          </a:p>
-          <a:p>
-            <a:pPr>
-              <a:spcAft>
-                <a:spcPts val="0"/>
-              </a:spcAft>
-            </a:pPr>
-            <a:r>
-              <a:rPr sz="1300">
-                <a:solidFill>
-                  <a:srgbClr val="6D8C97"/>
-                </a:solidFill>
-                <a:latin typeface="Consolas"/>
-              </a:rPr>
-              <a:t> 195  </a:t>
-            </a:r>
-            <a:r>
-              <a:rPr sz="1300">
-                <a:solidFill>
-                  <a:srgbClr val="7FE0A0"/>
-                </a:solidFill>
-                <a:latin typeface="Consolas"/>
-              </a:rPr>
-              <a:t>  history.push({ role: 'user', content: text });</a:t>
-            </a:r>
-          </a:p>
-          <a:p>
-            <a:pPr>
-              <a:spcAft>
-                <a:spcPts val="0"/>
-              </a:spcAft>
-            </a:pPr>
-            <a:r>
-              <a:rPr sz="1300">
-                <a:solidFill>
-                  <a:srgbClr val="6D8C97"/>
-                </a:solidFill>
-                <a:latin typeface="Consolas"/>
-              </a:rPr>
-              <a:t> 196  </a:t>
-            </a:r>
-            <a:r>
-              <a:rPr sz="1300">
-                <a:solidFill>
-                  <a:srgbClr val="7FE0A0"/>
-                </a:solidFill>
-                <a:latin typeface="Consolas"/>
-              </a:rPr>
-              <a:t> </a:t>
-            </a:r>
-          </a:p>
-          <a:p>
-            <a:pPr>
-              <a:spcAft>
-                <a:spcPts val="0"/>
-              </a:spcAft>
-            </a:pPr>
-            <a:r>
-              <a:rPr sz="1300">
-                <a:solidFill>
-                  <a:srgbClr val="6D8C97"/>
-                </a:solidFill>
-                <a:latin typeface="Consolas"/>
-              </a:rPr>
-              <a:t> 197  </a:t>
-            </a:r>
-            <a:r>
-              <a:rPr sz="1300">
-                <a:solidFill>
-                  <a:srgbClr val="7FE0A0"/>
-                </a:solidFill>
-                <a:latin typeface="Consolas"/>
-              </a:rPr>
-              <a:t>  const bubble = addLine('bot', '');</a:t>
-            </a:r>
-          </a:p>
-          <a:p>
-            <a:pPr>
-              <a:spcAft>
-                <a:spcPts val="0"/>
-              </a:spcAft>
-            </a:pPr>
-            <a:r>
-              <a:rPr sz="1300">
-                <a:solidFill>
-                  <a:srgbClr val="6D8C97"/>
-                </a:solidFill>
-                <a:latin typeface="Consolas"/>
-              </a:rPr>
-              <a:t> 198  </a:t>
-            </a:r>
-            <a:r>
-              <a:rPr sz="1300">
-                <a:solidFill>
-                  <a:srgbClr val="7FE0A0"/>
-                </a:solidFill>
-                <a:latin typeface="Consolas"/>
-              </a:rPr>
-              <a:t>  bubble.classList.add('writing');   // week 11: blinking cursor while it types</a:t>
-            </a:r>
-          </a:p>
-          <a:p>
-            <a:pPr>
-              <a:spcAft>
-                <a:spcPts val="0"/>
-              </a:spcAft>
-            </a:pPr>
-            <a:r>
-              <a:rPr sz="1300">
-                <a:solidFill>
-                  <a:srgbClr val="6D8C97"/>
-                </a:solidFill>
-                <a:latin typeface="Consolas"/>
-              </a:rPr>
-              <a:t> 199  </a:t>
-            </a:r>
-            <a:r>
-              <a:rPr sz="1300">
-                <a:solidFill>
-                  <a:srgbClr val="7FE0A0"/>
-                </a:solidFill>
-                <a:latin typeface="Consolas"/>
-              </a:rPr>
-              <a:t>  try {</a:t>
-            </a:r>
-          </a:p>
-          <a:p>
-            <a:pPr>
-              <a:spcAft>
-                <a:spcPts val="0"/>
-              </a:spcAft>
-            </a:pPr>
-            <a:r>
-              <a:rPr sz="1300">
-                <a:solidFill>
-                  <a:srgbClr val="6D8C97"/>
-                </a:solidFill>
-                <a:latin typeface="Consolas"/>
-              </a:rPr>
-              <a:t> 200  </a:t>
-            </a:r>
-            <a:r>
-              <a:rPr sz="1300">
-                <a:solidFill>
-                  <a:srgbClr val="7FE0A0"/>
-                </a:solidFill>
-                <a:latin typeface="Consolas"/>
-              </a:rPr>
-              <a:t>    // The function we hand over runs on EVERY piece that arrives.</a:t>
-            </a:r>
-          </a:p>
-          <a:p>
-            <a:pPr>
-              <a:spcAft>
-                <a:spcPts val="0"/>
-              </a:spcAft>
-            </a:pPr>
-            <a:r>
-              <a:rPr sz="1300">
-                <a:solidFill>
-                  <a:srgbClr val="6D8C97"/>
-                </a:solidFill>
-                <a:latin typeface="Consolas"/>
-              </a:rPr>
-              <a:t> 201  </a:t>
-            </a:r>
-            <a:r>
-              <a:rPr sz="1300">
-                <a:solidFill>
-                  <a:srgbClr val="7FE0A0"/>
-                </a:solidFill>
-                <a:latin typeface="Consolas"/>
-              </a:rPr>
-              <a:t>    const reply = await askAI(function (soFar) {</a:t>
-            </a:r>
-          </a:p>
-          <a:p>
-            <a:pPr>
-              <a:spcAft>
-                <a:spcPts val="0"/>
-              </a:spcAft>
-            </a:pPr>
-            <a:r>
-              <a:rPr sz="1300">
-                <a:solidFill>
-                  <a:srgbClr val="6D8C97"/>
-                </a:solidFill>
-                <a:latin typeface="Consolas"/>
-              </a:rPr>
-              <a:t> 202  </a:t>
-            </a:r>
-            <a:r>
-              <a:rPr sz="1300">
-                <a:solidFill>
-                  <a:srgbClr val="7FE0A0"/>
-                </a:solidFill>
-                <a:latin typeface="Consolas"/>
-              </a:rPr>
-              <a:t>      bubble.textContent = soFar;</a:t>
-            </a:r>
-          </a:p>
-          <a:p>
-            <a:pPr>
-              <a:spcAft>
-                <a:spcPts val="0"/>
-              </a:spcAft>
-            </a:pPr>
-            <a:r>
-              <a:rPr sz="1300">
-                <a:solidFill>
-                  <a:srgbClr val="6D8C97"/>
-                </a:solidFill>
-                <a:latin typeface="Consolas"/>
-              </a:rPr>
-              <a:t> 203  </a:t>
-            </a:r>
-            <a:r>
-              <a:rPr sz="1300">
-                <a:solidFill>
-                  <a:srgbClr val="7FE0A0"/>
-                </a:solidFill>
-                <a:latin typeface="Consolas"/>
-              </a:rPr>
-              <a:t>      chat.scrollTop = chat.scrollHeight;</a:t>
-            </a:r>
-          </a:p>
-          <a:p>
-            <a:pPr>
-              <a:spcAft>
-                <a:spcPts val="0"/>
-              </a:spcAft>
-            </a:pPr>
-            <a:r>
-              <a:rPr sz="1300">
-                <a:solidFill>
-                  <a:srgbClr val="6D8C97"/>
-                </a:solidFill>
-                <a:latin typeface="Consolas"/>
-              </a:rPr>
-              <a:t> 204  </a:t>
-            </a:r>
-            <a:r>
-              <a:rPr sz="1300">
-                <a:solidFill>
-                  <a:srgbClr val="7FE0A0"/>
-                </a:solidFill>
-                <a:latin typeface="Consolas"/>
-              </a:rPr>
-              <a:t>    });</a:t>
-            </a:r>
-          </a:p>
-          <a:p>
-            <a:pPr>
-              <a:spcAft>
-                <a:spcPts val="0"/>
-              </a:spcAft>
-            </a:pPr>
-            <a:r>
-              <a:rPr sz="1300">
-                <a:solidFill>
-                  <a:srgbClr val="6D8C97"/>
-                </a:solidFill>
-                <a:latin typeface="Consolas"/>
-              </a:rPr>
-              <a:t> 205  </a:t>
-            </a:r>
-            <a:r>
-              <a:rPr sz="1300">
-                <a:solidFill>
-                  <a:srgbClr val="7FE0A0"/>
-                </a:solidFill>
-                <a:latin typeface="Consolas"/>
-              </a:rPr>
-              <a:t>    bubble.classList.remove('writing');</a:t>
-            </a:r>
-          </a:p>
-          <a:p>
-            <a:pPr>
-              <a:spcAft>
-                <a:spcPts val="0"/>
-              </a:spcAft>
-            </a:pPr>
-            <a:r>
-              <a:rPr sz="1300">
-                <a:solidFill>
-                  <a:srgbClr val="6D8C97"/>
-                </a:solidFill>
-                <a:latin typeface="Consolas"/>
-              </a:rPr>
-              <a:t> 206  </a:t>
-            </a:r>
-            <a:r>
-              <a:rPr sz="1300">
-                <a:solidFill>
-                  <a:srgbClr val="7FE0A0"/>
-                </a:solidFill>
-                <a:latin typeface="Consolas"/>
-              </a:rPr>
-              <a:t>    history.push({ role: 'assistant', content: reply });   // it said this too</a:t>
-            </a:r>
-          </a:p>
-          <a:p>
-            <a:pPr>
-              <a:spcAft>
-                <a:spcPts val="0"/>
-              </a:spcAft>
-            </a:pPr>
-            <a:r>
-              <a:rPr sz="1300">
-                <a:solidFill>
-                  <a:srgbClr val="6D8C97"/>
-                </a:solidFill>
-                <a:latin typeface="Consolas"/>
-              </a:rPr>
-              <a:t> 207  </a:t>
-            </a:r>
-            <a:r>
-              <a:rPr sz="1300">
-                <a:solidFill>
-                  <a:srgbClr val="7FE0A0"/>
-                </a:solidFill>
-                <a:latin typeface="Consolas"/>
-              </a:rPr>
-              <a:t>  } catch (problem) {</a:t>
-            </a:r>
-          </a:p>
-          <a:p>
-            <a:pPr>
-              <a:spcAft>
-                <a:spcPts val="0"/>
-              </a:spcAft>
-            </a:pPr>
-            <a:r>
-              <a:rPr sz="1300">
-                <a:solidFill>
-                  <a:srgbClr val="6D8C97"/>
-                </a:solidFill>
-                <a:latin typeface="Consolas"/>
-              </a:rPr>
-              <a:t> 208  </a:t>
-            </a:r>
-            <a:r>
-              <a:rPr sz="1300">
-                <a:solidFill>
-                  <a:srgbClr val="7FE0A0"/>
-                </a:solidFill>
-                <a:latin typeface="Consolas"/>
-              </a:rPr>
-              <a:t>    bubble.remove();</a:t>
-            </a:r>
-          </a:p>
-          <a:p>
-            <a:pPr>
-              <a:spcAft>
-                <a:spcPts val="0"/>
-              </a:spcAft>
-            </a:pPr>
-            <a:r>
-              <a:rPr sz="1300">
-                <a:solidFill>
-                  <a:srgbClr val="6D8C97"/>
-                </a:solidFill>
-                <a:latin typeface="Consolas"/>
-              </a:rPr>
-              <a:t> 209  </a:t>
-            </a:r>
-            <a:r>
-              <a:rPr sz="1300">
-                <a:solidFill>
-                  <a:srgbClr val="7FE0A0"/>
-                </a:solidFill>
-                <a:latin typeface="Consolas"/>
-              </a:rPr>
-              <a:t>    // 'Failed to fetch' means the request never arrived anywhere. That is</a:t>
-            </a:r>
-          </a:p>
-          <a:p>
-            <a:pPr>
-              <a:spcAft>
-                <a:spcPts val="0"/>
-              </a:spcAft>
-            </a:pPr>
-            <a:r>
-              <a:rPr sz="1300">
-                <a:solidFill>
-                  <a:srgbClr val="6D8C97"/>
-                </a:solidFill>
-                <a:latin typeface="Consolas"/>
-              </a:rPr>
-              <a:t> 210  </a:t>
-            </a:r>
-            <a:r>
-              <a:rPr sz="1300">
-                <a:solidFill>
-                  <a:srgbClr val="7FE0A0"/>
-                </a:solidFill>
-                <a:latin typeface="Consolas"/>
-              </a:rPr>
-              <a:t>    // the commonest real failure and the least helpful wording, so replace it.</a:t>
-            </a:r>
-          </a:p>
-          <a:p>
-            <a:pPr>
-              <a:spcAft>
-                <a:spcPts val="0"/>
-              </a:spcAft>
-            </a:pPr>
-            <a:r>
-              <a:rPr sz="1300">
-                <a:solidFill>
-                  <a:srgbClr val="6D8C97"/>
-                </a:solidFill>
-                <a:latin typeface="Consolas"/>
-              </a:rPr>
-              <a:t> 211  </a:t>
-            </a:r>
-            <a:r>
-              <a:rPr sz="1300">
-                <a:solidFill>
-                  <a:srgbClr val="7FE0A0"/>
-                </a:solidFill>
-                <a:latin typeface="Consolas"/>
-              </a:rPr>
-              <a:t>    const said = problem.message === 'Failed to fetch'</a:t>
-            </a:r>
-          </a:p>
-          <a:p>
-            <a:pPr>
-              <a:spcAft>
-                <a:spcPts val="0"/>
-              </a:spcAft>
-            </a:pPr>
-            <a:r>
-              <a:rPr sz="1300">
-                <a:solidFill>
-                  <a:srgbClr val="6D8C97"/>
-                </a:solidFill>
-                <a:latin typeface="Consolas"/>
-              </a:rPr>
-              <a:t> 212  </a:t>
-            </a:r>
-            <a:r>
-              <a:rPr sz="1300">
-                <a:solidFill>
-                  <a:srgbClr val="7FE0A0"/>
-                </a:solidFill>
-                <a:latin typeface="Consolas"/>
-              </a:rPr>
-              <a:t>      ? 'Could not reach the AI. Are you on the school network?'</a:t>
-            </a:r>
-          </a:p>
-          <a:p>
-            <a:pPr>
-              <a:spcAft>
-                <a:spcPts val="0"/>
-              </a:spcAft>
-            </a:pPr>
-            <a:r>
-              <a:rPr sz="1300">
-                <a:solidFill>
-                  <a:srgbClr val="6D8C97"/>
-                </a:solidFill>
-                <a:latin typeface="Consolas"/>
-              </a:rPr>
-              <a:t> 213  </a:t>
-            </a:r>
-            <a:r>
-              <a:rPr sz="1300">
-                <a:solidFill>
-                  <a:srgbClr val="7FE0A0"/>
-                </a:solidFill>
-                <a:latin typeface="Consolas"/>
-              </a:rPr>
-              <a:t>      : problem.message;</a:t>
-            </a:r>
-          </a:p>
-          <a:p>
-            <a:pPr>
-              <a:spcAft>
-                <a:spcPts val="0"/>
-              </a:spcAft>
-            </a:pPr>
-            <a:r>
-              <a:rPr sz="1300">
-                <a:solidFill>
-                  <a:srgbClr val="6D8C97"/>
-                </a:solidFill>
-                <a:latin typeface="Consolas"/>
-              </a:rPr>
-              <a:t> 214  </a:t>
-            </a:r>
-            <a:r>
-              <a:rPr sz="1300">
-                <a:solidFill>
-                  <a:srgbClr val="7FE0A0"/>
-                </a:solidFill>
-                <a:latin typeface="Consolas"/>
-              </a:rPr>
-              <a:t>    addLine('problem', said);</a:t>
-            </a:r>
-          </a:p>
-          <a:p>
-            <a:pPr>
-              <a:spcAft>
-                <a:spcPts val="0"/>
-              </a:spcAft>
-            </a:pPr>
-            <a:r>
-              <a:rPr sz="1300">
-                <a:solidFill>
-                  <a:srgbClr val="6D8C97"/>
-                </a:solidFill>
-                <a:latin typeface="Consolas"/>
-              </a:rPr>
-              <a:t> 215  </a:t>
-            </a:r>
-            <a:r>
-              <a:rPr sz="1300">
-                <a:solidFill>
-                  <a:srgbClr val="7FE0A0"/>
-                </a:solidFill>
-                <a:latin typeface="Consolas"/>
-              </a:rPr>
-              <a:t>  }</a:t>
-            </a:r>
-          </a:p>
-          <a:p>
-            <a:pPr>
-              <a:spcAft>
-                <a:spcPts val="0"/>
-              </a:spcAft>
-            </a:pPr>
-            <a:r>
-              <a:rPr sz="1300">
-                <a:solidFill>
-                  <a:srgbClr val="6D8C97"/>
-                </a:solidFill>
-                <a:latin typeface="Consolas"/>
-              </a:rPr>
-              <a:t> 216  </a:t>
-            </a:r>
-            <a:r>
-              <a:rPr sz="1300">
-                <a:solidFill>
-                  <a:srgbClr val="7FE0A0"/>
-                </a:solidFill>
-                <a:latin typeface="Consolas"/>
-              </a:rPr>
-              <a:t>});</a:t>
-            </a:r>
-          </a:p>
-        </p:txBody>
-      </p:sp>
-      <p:sp>
-        <p:nvSpPr>
-          <p:cNvPr id="4" name="TextBox 3"/>
-          <p:cNvSpPr txBox="1"/>
-          <p:nvPr/>
-        </p:nvSpPr>
-        <p:spPr>
-          <a:xfrm>
-            <a:off x="548640" y="5623560"/>
-            <a:ext cx="11064240" cy="1051560"/>
-          </a:xfrm>
-          <a:prstGeom prst="rect">
-            <a:avLst/>
-          </a:prstGeom>
-          <a:noFill/>
-        </p:spPr>
-        <p:txBody>
           <a:bodyPr wrap="square">
             <a:spAutoFit/>
           </a:bodyPr>
           <a:lstStyle/>
           <a:p>
-            <a:r>
-              <a:rPr sz="2000">
-                <a:solidFill>
-                  <a:srgbClr val="DCECEF"/>
-                </a:solidFill>
-              </a:rPr>
-              <a:t>That is the whole piece. Check yours looks the same before moving on.</a:t>
+            <a:pPr>
+              <a:spcAft>
+                <a:spcPts val="1400"/>
+              </a:spcAft>
+            </a:pPr>
+            <a:r>
+              <a:rPr sz="2400">
+                <a:solidFill>
+                  <a:srgbClr val="1F2A37"/>
+                </a:solidFill>
+              </a:rPr>
+              <a:t>• A. It is rude</a:t>
+            </a:r>
+          </a:p>
+          <a:p>
+            <a:pPr>
+              <a:spcAft>
+                <a:spcPts val="1400"/>
+              </a:spcAft>
+            </a:pPr>
+            <a:r>
+              <a:rPr sz="2400">
+                <a:solidFill>
+                  <a:srgbClr val="1F2A37"/>
+                </a:solidFill>
+              </a:rPr>
+              <a:t>• B. The AI cannot read it</a:t>
+            </a:r>
+          </a:p>
+          <a:p>
+            <a:pPr>
+              <a:spcAft>
+                <a:spcPts val="1400"/>
+              </a:spcAft>
+            </a:pPr>
+            <a:r>
+              <a:rPr sz="2400">
+                <a:solidFill>
+                  <a:srgbClr val="1F2A37"/>
+                </a:solidFill>
+              </a:rPr>
+              <a:t>• C. To save the file</a:t>
+            </a:r>
+          </a:p>
+          <a:p>
+            <a:pPr>
+              <a:spcAft>
+                <a:spcPts val="1400"/>
+              </a:spcAft>
+            </a:pPr>
+            <a:r>
+              <a:rPr sz="2400">
+                <a:solidFill>
+                  <a:srgbClr val="1F2A37"/>
+                </a:solidFill>
+              </a:rPr>
+              <a:t>• D. A huge message wastes the budget and gets the request refused for everyone</a:t>
+            </a:r>
+          </a:p>
+          <a:p>
+            <a:pPr>
+              <a:spcAft>
+                <a:spcPts val="1400"/>
+              </a:spcAft>
+            </a:pPr>
+            <a:r>
+              <a:rPr sz="2400">
+                <a:solidFill>
+                  <a:srgbClr val="1F2A37"/>
+                </a:solidFill>
+              </a:rPr>
+              <a:t>• Pick one - the answer is on the next slide.</a:t>
             </a:r>
           </a:p>
         </p:txBody>
@@ -5567,7 +5352,7 @@
                   <a:srgbClr val="01AEFD"/>
                 </a:solidFill>
               </a:rPr>
-              <a:t>QUICK CHECK</a:t>
+              <a:t>ANSWER</a:t>
             </a:r>
           </a:p>
         </p:txBody>
@@ -5650,7 +5435,7 @@
                   <a:srgbClr val="1F2A37"/>
                 </a:solidFill>
               </a:rPr>
-              <a:t>• D. A huge message wastes the budget and gets the request refused for everyone</a:t>
+              <a:t>• D. A huge message wastes the budget and gets the request refused for everyone (correct)</a:t>
             </a:r>
           </a:p>
           <a:p>
@@ -5665,7 +5450,7 @@
                   <a:srgbClr val="1F2A37"/>
                 </a:solidFill>
               </a:rPr>
-              <a:t>• Pick one - the answer is on the next slide.</a:t>
+              <a:t>• One giant message can blow past the 4000-character wall and get the whole request refused.</a:t>
             </a:r>
           </a:p>
         </p:txBody>
@@ -5709,7 +5494,7 @@
                   <a:srgbClr val="1F2A37"/>
                 </a:solidFill>
               </a:rPr>
-              <a:t>Why refuse a message over 500 characters?</a:t>
+              <a:t>text.length is ...</a:t>
             </a:r>
           </a:p>
         </p:txBody>
@@ -5742,7 +5527,7 @@
                   <a:srgbClr val="01AEFD"/>
                 </a:solidFill>
               </a:rPr>
-              <a:t>ANSWER</a:t>
+              <a:t>QUICK CHECK</a:t>
             </a:r>
           </a:p>
         </p:txBody>
@@ -5780,7 +5565,7 @@
                   <a:srgbClr val="1F2A37"/>
                 </a:solidFill>
               </a:rPr>
-              <a:t>• A. It is rude</a:t>
+              <a:t>• A. the AI's reply</a:t>
             </a:r>
           </a:p>
           <a:p>
@@ -5795,7 +5580,7 @@
                   <a:srgbClr val="1F2A37"/>
                 </a:solidFill>
               </a:rPr>
-              <a:t>• B. The AI cannot read it</a:t>
+              <a:t>• B. the number of characters in text</a:t>
             </a:r>
           </a:p>
           <a:p>
@@ -5810,7 +5595,7 @@
                   <a:srgbClr val="1F2A37"/>
                 </a:solidFill>
               </a:rPr>
-              <a:t>• C. To save the file</a:t>
+              <a:t>• C. true or false</a:t>
             </a:r>
           </a:p>
           <a:p>
@@ -5825,7 +5610,7 @@
                   <a:srgbClr val="1F2A37"/>
                 </a:solidFill>
               </a:rPr>
-              <a:t>• D. A huge message wastes the budget and gets the request refused for everyone (correct)</a:t>
+              <a:t>• D. the temperature</a:t>
             </a:r>
           </a:p>
           <a:p>
@@ -5840,7 +5625,7 @@
                   <a:srgbClr val="1F2A37"/>
                 </a:solidFill>
               </a:rPr>
-              <a:t>• One giant message can blow past the 4000-character wall and get the whole request refused.</a:t>
+              <a:t>• Pick one - the answer is on the next slide.</a:t>
             </a:r>
           </a:p>
         </p:txBody>
@@ -5917,7 +5702,7 @@
                   <a:srgbClr val="01AEFD"/>
                 </a:solidFill>
               </a:rPr>
-              <a:t>QUICK CHECK</a:t>
+              <a:t>ANSWER</a:t>
             </a:r>
           </a:p>
         </p:txBody>
@@ -5970,7 +5755,7 @@
                   <a:srgbClr val="1F2A37"/>
                 </a:solidFill>
               </a:rPr>
-              <a:t>• B. the number of characters in text</a:t>
+              <a:t>• B. the number of characters in text (correct)</a:t>
             </a:r>
           </a:p>
           <a:p>
@@ -6015,7 +5800,7 @@
                   <a:srgbClr val="1F2A37"/>
                 </a:solidFill>
               </a:rPr>
-              <a:t>• Pick one - the answer is on the next slide.</a:t>
+              <a:t>• .length on a string is its character count.</a:t>
             </a:r>
           </a:p>
         </p:txBody>
@@ -6059,7 +5844,7 @@
                   <a:srgbClr val="1F2A37"/>
                 </a:solidFill>
               </a:rPr>
-              <a:t>text.length is ...</a:t>
+              <a:t>The caution line under the title reminds users that ...</a:t>
             </a:r>
           </a:p>
         </p:txBody>
@@ -6092,7 +5877,7 @@
                   <a:srgbClr val="01AEFD"/>
                 </a:solidFill>
               </a:rPr>
-              <a:t>ANSWER</a:t>
+              <a:t>QUICK CHECK</a:t>
             </a:r>
           </a:p>
         </p:txBody>
@@ -6130,7 +5915,7 @@
                   <a:srgbClr val="1F2A37"/>
                 </a:solidFill>
               </a:rPr>
-              <a:t>• A. the AI's reply</a:t>
+              <a:t>• A. the AI is always right</a:t>
             </a:r>
           </a:p>
           <a:p>
@@ -6145,7 +5930,7 @@
                   <a:srgbClr val="1F2A37"/>
                 </a:solidFill>
               </a:rPr>
-              <a:t>• B. the number of characters in text (correct)</a:t>
+              <a:t>• B. the AI can be confidently wrong - check what matters</a:t>
             </a:r>
           </a:p>
           <a:p>
@@ -6160,7 +5945,7 @@
                   <a:srgbClr val="1F2A37"/>
                 </a:solidFill>
               </a:rPr>
-              <a:t>• C. true or false</a:t>
+              <a:t>• C. to save often</a:t>
             </a:r>
           </a:p>
           <a:p>
@@ -6175,7 +5960,7 @@
                   <a:srgbClr val="1F2A37"/>
                 </a:solidFill>
               </a:rPr>
-              <a:t>• D. the temperature</a:t>
+              <a:t>• D. to pick a character</a:t>
             </a:r>
           </a:p>
           <a:p>
@@ -6190,7 +5975,7 @@
                   <a:srgbClr val="1F2A37"/>
                 </a:solidFill>
               </a:rPr>
-              <a:t>• .length on a string is its character count.</a:t>
+              <a:t>• Pick one - the answer is on the next slide.</a:t>
             </a:r>
           </a:p>
         </p:txBody>
@@ -6267,7 +6052,7 @@
                   <a:srgbClr val="01AEFD"/>
                 </a:solidFill>
               </a:rPr>
-              <a:t>QUICK CHECK</a:t>
+              <a:t>ANSWER</a:t>
             </a:r>
           </a:p>
         </p:txBody>
@@ -6320,7 +6105,7 @@
                   <a:srgbClr val="1F2A37"/>
                 </a:solidFill>
               </a:rPr>
-              <a:t>• B. the AI can be confidently wrong - check what matters</a:t>
+              <a:t>• B. the AI can be confidently wrong - check what matters (correct)</a:t>
             </a:r>
           </a:p>
           <a:p>
@@ -6365,7 +6150,7 @@
                   <a:srgbClr val="1F2A37"/>
                 </a:solidFill>
               </a:rPr>
-              <a:t>• Pick one - the answer is on the next slide.</a:t>
+              <a:t>• Even a fluent, confident answer can be wrong; the caution keeps students sceptical.</a:t>
             </a:r>
           </a:p>
         </p:txBody>
@@ -6409,7 +6194,7 @@
                   <a:srgbClr val="1F2A37"/>
                 </a:solidFill>
               </a:rPr>
-              <a:t>The caution line under the title reminds users that ...</a:t>
+              <a:t>From week 5 - why check if (!res.ok)?</a:t>
             </a:r>
           </a:p>
         </p:txBody>
@@ -6442,7 +6227,7 @@
                   <a:srgbClr val="01AEFD"/>
                 </a:solidFill>
               </a:rPr>
-              <a:t>ANSWER</a:t>
+              <a:t>QUICK CHECK</a:t>
             </a:r>
           </a:p>
         </p:txBody>
@@ -6480,7 +6265,7 @@
                   <a:srgbClr val="1F2A37"/>
                 </a:solidFill>
               </a:rPr>
-              <a:t>• A. the AI is always right</a:t>
+              <a:t>• A. to make it faster</a:t>
             </a:r>
           </a:p>
           <a:p>
@@ -6495,7 +6280,7 @@
                   <a:srgbClr val="1F2A37"/>
                 </a:solidFill>
               </a:rPr>
-              <a:t>• B. the AI can be confidently wrong - check what matters (correct)</a:t>
+              <a:t>• B. to stream the reply</a:t>
             </a:r>
           </a:p>
           <a:p>
@@ -6510,7 +6295,7 @@
                   <a:srgbClr val="1F2A37"/>
                 </a:solidFill>
               </a:rPr>
-              <a:t>• C. to save often</a:t>
+              <a:t>• C. to save the chat</a:t>
             </a:r>
           </a:p>
           <a:p>
@@ -6525,7 +6310,7 @@
                   <a:srgbClr val="1F2A37"/>
                 </a:solidFill>
               </a:rPr>
-              <a:t>• D. to pick a character</a:t>
+              <a:t>• D. fetch does NOT throw on a refusal, so you must check yourself</a:t>
             </a:r>
           </a:p>
           <a:p>
@@ -6540,7 +6325,7 @@
                   <a:srgbClr val="1F2A37"/>
                 </a:solidFill>
               </a:rPr>
-              <a:t>• Even a fluent, confident answer can be wrong; the caution keeps students sceptical.</a:t>
+              <a:t>• Pick one - the answer is on the next slide.</a:t>
             </a:r>
           </a:p>
         </p:txBody>
@@ -6744,7 +6529,7 @@
                   <a:srgbClr val="01AEFD"/>
                 </a:solidFill>
               </a:rPr>
-              <a:t>QUICK CHECK</a:t>
+              <a:t>ANSWER</a:t>
             </a:r>
           </a:p>
         </p:txBody>
@@ -6827,7 +6612,7 @@
                   <a:srgbClr val="1F2A37"/>
                 </a:solidFill>
               </a:rPr>
-              <a:t>• D. fetch does NOT throw on a refusal, so you must check yourself</a:t>
+              <a:t>• D. fetch does NOT throw on a refusal, so you must check yourself (correct)</a:t>
             </a:r>
           </a:p>
           <a:p>
@@ -6842,7 +6627,7 @@
                   <a:srgbClr val="1F2A37"/>
                 </a:solidFill>
               </a:rPr>
-              <a:t>• Pick one - the answer is on the next slide.</a:t>
+              <a:t>• A 401 or 429 looks just like a success to fetch until you check res.ok.</a:t>
             </a:r>
           </a:p>
         </p:txBody>
@@ -6886,7 +6671,7 @@
                   <a:srgbClr val="1F2A37"/>
                 </a:solidFill>
               </a:rPr>
-              <a:t>From week 5 - why check if (!res.ok)?</a:t>
+              <a:t>From week 8 - what keeps the conversation under the server's limit?</a:t>
             </a:r>
           </a:p>
         </p:txBody>
@@ -6919,7 +6704,7 @@
                   <a:srgbClr val="01AEFD"/>
                 </a:solidFill>
               </a:rPr>
-              <a:t>ANSWER</a:t>
+              <a:t>QUICK CHECK</a:t>
             </a:r>
           </a:p>
         </p:txBody>
@@ -6957,7 +6742,7 @@
                   <a:srgbClr val="1F2A37"/>
                 </a:solidFill>
               </a:rPr>
-              <a:t>• A. to make it faster</a:t>
+              <a:t>• A. the AI shortens it</a:t>
             </a:r>
           </a:p>
           <a:p>
@@ -6972,7 +6757,7 @@
                   <a:srgbClr val="1F2A37"/>
                 </a:solidFill>
               </a:rPr>
-              <a:t>• B. to stream the reply</a:t>
+              <a:t>• B. nothing</a:t>
             </a:r>
           </a:p>
           <a:p>
@@ -6987,7 +6772,7 @@
                   <a:srgbClr val="1F2A37"/>
                 </a:solidFill>
               </a:rPr>
-              <a:t>• C. to save the chat</a:t>
+              <a:t>• C. trimHistory drops the oldest messages</a:t>
             </a:r>
           </a:p>
           <a:p>
@@ -7002,7 +6787,7 @@
                   <a:srgbClr val="1F2A37"/>
                 </a:solidFill>
               </a:rPr>
-              <a:t>• D. fetch does NOT throw on a refusal, so you must check yourself (correct)</a:t>
+              <a:t>• D. the temperature slider</a:t>
             </a:r>
           </a:p>
           <a:p>
@@ -7017,7 +6802,7 @@
                   <a:srgbClr val="1F2A37"/>
                 </a:solidFill>
               </a:rPr>
-              <a:t>• A 401 or 429 looks just like a success to fetch until you check res.ok.</a:t>
+              <a:t>• Pick one - the answer is on the next slide.</a:t>
             </a:r>
           </a:p>
         </p:txBody>
@@ -7094,7 +6879,7 @@
                   <a:srgbClr val="01AEFD"/>
                 </a:solidFill>
               </a:rPr>
-              <a:t>QUICK CHECK</a:t>
+              <a:t>ANSWER</a:t>
             </a:r>
           </a:p>
         </p:txBody>
@@ -7162,7 +6947,7 @@
                   <a:srgbClr val="1F2A37"/>
                 </a:solidFill>
               </a:rPr>
-              <a:t>• C. trimHistory drops the oldest messages</a:t>
+              <a:t>• C. trimHistory drops the oldest messages (correct)</a:t>
             </a:r>
           </a:p>
           <a:p>
@@ -7192,7 +6977,7 @@
                   <a:srgbClr val="1F2A37"/>
                 </a:solidFill>
               </a:rPr>
-              <a:t>• Pick one - the answer is on the next slide.</a:t>
+              <a:t>• trimHistory removes old messages so each request stays under the 4000-character wall.</a:t>
             </a:r>
           </a:p>
         </p:txBody>
@@ -7208,6 +6993,14 @@
 <file path=ppt/slides/slide23.xml><?xml version="1.0" encoding="utf-8"?>
 <p:sld xmlns:a="http://schemas.openxmlformats.org/drawingml/2006/main" xmlns:p="http://schemas.openxmlformats.org/presentationml/2006/main" xmlns:r="http://schemas.openxmlformats.org/officeDocument/2006/relationships">
   <p:cSld>
+    <p:bg>
+      <p:bgPr>
+        <a:solidFill>
+          <a:srgbClr val="102127"/>
+        </a:solidFill>
+        <a:effectLst/>
+      </p:bgPr>
+    </p:bg>
     <p:spTree>
       <p:nvGrpSpPr>
         <p:cNvPr id="1" name=""/>
@@ -7217,40 +7010,14 @@
       <p:grpSpPr/>
       <p:sp>
         <p:nvSpPr>
-          <p:cNvPr id="2" name="Title 1"/>
-          <p:cNvSpPr>
-            <a:spLocks noGrp="1"/>
-          </p:cNvSpPr>
-          <p:nvPr>
-            <p:ph type="title"/>
-          </p:nvPr>
-        </p:nvSpPr>
-        <p:spPr/>
-        <p:txBody>
-          <a:bodyPr/>
-          <a:lstStyle/>
-          <a:p>
-            <a:r>
-              <a:rPr sz="3800" b="1">
-                <a:solidFill>
-                  <a:srgbClr val="1F2A37"/>
-                </a:solidFill>
-              </a:rPr>
-              <a:t>From week 8 - what keeps the conversation under the server's limit?</a:t>
-            </a:r>
-          </a:p>
-        </p:txBody>
-      </p:sp>
-      <p:sp>
-        <p:nvSpPr>
-          <p:cNvPr id="3" name="TextBox 2"/>
+          <p:cNvPr id="2" name="TextBox 1"/>
           <p:cNvSpPr txBox="1"/>
           <p:nvPr/>
         </p:nvSpPr>
         <p:spPr>
           <a:xfrm>
-            <a:off x="868680" y="502920"/>
-            <a:ext cx="5486400" cy="457200"/>
+            <a:off x="502920" y="274320"/>
+            <a:ext cx="11155680" cy="548640"/>
           </a:xfrm>
           <a:prstGeom prst="rect">
             <a:avLst/>
@@ -7264,26 +7031,26 @@
           <a:lstStyle/>
           <a:p>
             <a:r>
-              <a:rPr sz="1500" b="1">
+              <a:rPr sz="2200" b="1">
                 <a:solidFill>
                   <a:srgbClr val="01AEFD"/>
                 </a:solidFill>
               </a:rPr>
-              <a:t>ANSWER</a:t>
-            </a:r>
-          </a:p>
-        </p:txBody>
-      </p:sp>
-      <p:sp>
-        <p:nvSpPr>
-          <p:cNvPr id="4" name="TextBox 3"/>
+              <a:t>Type this into index.html   -   line 7</a:t>
+            </a:r>
+          </a:p>
+        </p:txBody>
+      </p:sp>
+      <p:sp>
+        <p:nvSpPr>
+          <p:cNvPr id="3" name="TextBox 2"/>
           <p:cNvSpPr txBox="1"/>
           <p:nvPr/>
         </p:nvSpPr>
         <p:spPr>
           <a:xfrm>
-            <a:off x="822960" y="1828800"/>
-            <a:ext cx="10515600" cy="4206240"/>
+            <a:off x="502920" y="960120"/>
+            <a:ext cx="11155680" cy="4297680"/>
           </a:xfrm>
           <a:prstGeom prst="rect">
             <a:avLst/>
@@ -7291,83 +7058,166 @@
           <a:noFill/>
         </p:spPr>
         <p:txBody>
+          <a:bodyPr wrap="none">
+            <a:spAutoFit/>
+          </a:bodyPr>
+          <a:lstStyle/>
+          <a:p>
+            <a:pPr>
+              <a:spcAft>
+                <a:spcPts val="0"/>
+              </a:spcAft>
+            </a:pPr>
+            <a:r>
+              <a:rPr sz="1800">
+                <a:solidFill>
+                  <a:srgbClr val="6D8C97"/>
+                </a:solidFill>
+                <a:latin typeface="Consolas"/>
+              </a:rPr>
+              <a:t>   3  </a:t>
+            </a:r>
+            <a:r>
+              <a:rPr sz="1800">
+                <a:solidFill>
+                  <a:srgbClr val="6D8C97"/>
+                </a:solidFill>
+                <a:latin typeface="Consolas"/>
+              </a:rPr>
+              <a:t>&lt;main class="app"&gt;</a:t>
+            </a:r>
+          </a:p>
+          <a:p>
+            <a:pPr>
+              <a:spcAft>
+                <a:spcPts val="0"/>
+              </a:spcAft>
+            </a:pPr>
+            <a:r>
+              <a:rPr sz="1800">
+                <a:solidFill>
+                  <a:srgbClr val="6D8C97"/>
+                </a:solidFill>
+                <a:latin typeface="Consolas"/>
+              </a:rPr>
+              <a:t>   4  </a:t>
+            </a:r>
+            <a:r>
+              <a:rPr sz="1800">
+                <a:solidFill>
+                  <a:srgbClr val="6D8C97"/>
+                </a:solidFill>
+                <a:latin typeface="Consolas"/>
+              </a:rPr>
+              <a:t>  &lt;header class="top"&gt;</a:t>
+            </a:r>
+          </a:p>
+          <a:p>
+            <a:pPr>
+              <a:spcAft>
+                <a:spcPts val="0"/>
+              </a:spcAft>
+            </a:pPr>
+            <a:r>
+              <a:rPr sz="1800">
+                <a:solidFill>
+                  <a:srgbClr val="6D8C97"/>
+                </a:solidFill>
+                <a:latin typeface="Consolas"/>
+              </a:rPr>
+              <a:t>   5  </a:t>
+            </a:r>
+            <a:r>
+              <a:rPr sz="1800">
+                <a:solidFill>
+                  <a:srgbClr val="6D8C97"/>
+                </a:solidFill>
+                <a:latin typeface="Consolas"/>
+              </a:rPr>
+              <a:t>    &lt;h1&gt;My AI Companion&lt;/h1&gt;</a:t>
+            </a:r>
+          </a:p>
+          <a:p>
+            <a:pPr>
+              <a:spcAft>
+                <a:spcPts val="0"/>
+              </a:spcAft>
+            </a:pPr>
+            <a:r>
+              <a:rPr sz="1800">
+                <a:solidFill>
+                  <a:srgbClr val="6D8C97"/>
+                </a:solidFill>
+                <a:latin typeface="Consolas"/>
+              </a:rPr>
+              <a:t>   6  </a:t>
+            </a:r>
+            <a:r>
+              <a:rPr sz="1800">
+                <a:solidFill>
+                  <a:srgbClr val="6D8C97"/>
+                </a:solidFill>
+                <a:latin typeface="Consolas"/>
+              </a:rPr>
+              <a:t>    &lt;p class="tag"&gt;Built by me, running on the school AI&lt;/p&gt;</a:t>
+            </a:r>
+          </a:p>
+          <a:p>
+            <a:pPr>
+              <a:spcAft>
+                <a:spcPts val="0"/>
+              </a:spcAft>
+            </a:pPr>
+            <a:r>
+              <a:rPr sz="1800">
+                <a:solidFill>
+                  <a:srgbClr val="6D8C97"/>
+                </a:solidFill>
+                <a:latin typeface="Consolas"/>
+              </a:rPr>
+              <a:t>   7  </a:t>
+            </a:r>
+            <a:r>
+              <a:rPr sz="1800">
+                <a:solidFill>
+                  <a:srgbClr val="7FE0A0"/>
+                </a:solidFill>
+                <a:latin typeface="Consolas"/>
+              </a:rPr>
+              <a:t>    &lt;p class="caution"&gt;It can be confidently wrong. Check anything that matters.&lt;/p&gt;</a:t>
+            </a:r>
+          </a:p>
+        </p:txBody>
+      </p:sp>
+      <p:sp>
+        <p:nvSpPr>
+          <p:cNvPr id="4" name="TextBox 3"/>
+          <p:cNvSpPr txBox="1"/>
+          <p:nvPr/>
+        </p:nvSpPr>
+        <p:spPr>
+          <a:xfrm>
+            <a:off x="548640" y="5623560"/>
+            <a:ext cx="11064240" cy="1051560"/>
+          </a:xfrm>
+          <a:prstGeom prst="rect">
+            <a:avLst/>
+          </a:prstGeom>
+          <a:noFill/>
+        </p:spPr>
+        <p:txBody>
           <a:bodyPr wrap="square">
             <a:spAutoFit/>
           </a:bodyPr>
           <a:lstStyle/>
           <a:p>
-            <a:pPr>
-              <a:spcAft>
-                <a:spcPts val="1400"/>
-              </a:spcAft>
-            </a:pPr>
-            <a:r>
-              <a:rPr sz="2400">
-                <a:solidFill>
-                  <a:srgbClr val="1F2A37"/>
-                </a:solidFill>
-              </a:rPr>
-              <a:t>• A. the AI shortens it</a:t>
-            </a:r>
-          </a:p>
-          <a:p>
-            <a:pPr>
-              <a:spcAft>
-                <a:spcPts val="1400"/>
-              </a:spcAft>
-            </a:pPr>
-            <a:r>
-              <a:rPr sz="2400">
-                <a:solidFill>
-                  <a:srgbClr val="1F2A37"/>
-                </a:solidFill>
-              </a:rPr>
-              <a:t>• B. nothing</a:t>
-            </a:r>
-          </a:p>
-          <a:p>
-            <a:pPr>
-              <a:spcAft>
-                <a:spcPts val="1400"/>
-              </a:spcAft>
-            </a:pPr>
-            <a:r>
-              <a:rPr sz="2400">
-                <a:solidFill>
-                  <a:srgbClr val="1F2A37"/>
-                </a:solidFill>
-              </a:rPr>
-              <a:t>• C. trimHistory drops the oldest messages (correct)</a:t>
-            </a:r>
-          </a:p>
-          <a:p>
-            <a:pPr>
-              <a:spcAft>
-                <a:spcPts val="1400"/>
-              </a:spcAft>
-            </a:pPr>
-            <a:r>
-              <a:rPr sz="2400">
-                <a:solidFill>
-                  <a:srgbClr val="1F2A37"/>
-                </a:solidFill>
-              </a:rPr>
-              <a:t>• D. the temperature slider</a:t>
-            </a:r>
-          </a:p>
-          <a:p>
-            <a:pPr>
-              <a:spcAft>
-                <a:spcPts val="1400"/>
-              </a:spcAft>
-            </a:pPr>
-            <a:r>
-              <a:rPr sz="2400">
-                <a:solidFill>
-                  <a:srgbClr val="1F2A37"/>
-                </a:solidFill>
-              </a:rPr>
-              <a:t>• trimHistory removes old messages so each request stays under the 4000-character wall.</a:t>
+            <a:r>
+              <a:rPr sz="2000">
+                <a:solidFill>
+                  <a:srgbClr val="DCECEF"/>
+                </a:solidFill>
+              </a:rPr>
+              <a:t>A caution line under the title: the AI can be confidently wrong. class="caution" styles it.</a:t>
             </a:r>
           </a:p>
         </p:txBody>
@@ -7426,7 +7276,7 @@
                   <a:srgbClr val="01AEFD"/>
                 </a:solidFill>
               </a:rPr>
-              <a:t>Type this into index.html   -   line 7</a:t>
+              <a:t>Type this into style.css   -   line 7</a:t>
             </a:r>
           </a:p>
         </p:txBody>
@@ -7465,6 +7315,56 @@
                 </a:solidFill>
                 <a:latin typeface="Consolas"/>
               </a:rPr>
+              <a:t>   1  </a:t>
+            </a:r>
+            <a:r>
+              <a:rPr sz="1800">
+                <a:solidFill>
+                  <a:srgbClr val="6D8C97"/>
+                </a:solidFill>
+                <a:latin typeface="Consolas"/>
+              </a:rPr>
+              <a:t>body {</a:t>
+            </a:r>
+          </a:p>
+          <a:p>
+            <a:pPr>
+              <a:spcAft>
+                <a:spcPts val="0"/>
+              </a:spcAft>
+            </a:pPr>
+            <a:r>
+              <a:rPr sz="1800">
+                <a:solidFill>
+                  <a:srgbClr val="6D8C97"/>
+                </a:solidFill>
+                <a:latin typeface="Consolas"/>
+              </a:rPr>
+              <a:t>   2  </a:t>
+            </a:r>
+            <a:r>
+              <a:rPr sz="1800">
+                <a:solidFill>
+                  <a:srgbClr val="6D8C97"/>
+                </a:solidFill>
+                <a:latin typeface="Consolas"/>
+              </a:rPr>
+              <a:t>  margin: 0;</a:t>
+            </a:r>
+          </a:p>
+          <a:p>
+            <a:pPr>
+              <a:spcAft>
+                <a:spcPts val="0"/>
+              </a:spcAft>
+            </a:pPr>
+            <a:r>
+              <a:rPr sz="1800">
+                <a:solidFill>
+                  <a:srgbClr val="6D8C97"/>
+                </a:solidFill>
+                <a:latin typeface="Consolas"/>
+              </a:rPr>
               <a:t>   3  </a:t>
             </a:r>
             <a:r>
@@ -7474,7 +7374,7 @@
                 </a:solidFill>
                 <a:latin typeface="Consolas"/>
               </a:rPr>
-              <a:t>&lt;main class="app"&gt;</a:t>
+              <a:t>  font-family: Arial, Helvetica, sans-serif;</a:t>
             </a:r>
           </a:p>
           <a:p>
@@ -7499,7 +7399,7 @@
                 </a:solidFill>
                 <a:latin typeface="Consolas"/>
               </a:rPr>
-              <a:t>  &lt;header class="top"&gt;</a:t>
+              <a:t>  background: #eef2f7;</a:t>
             </a:r>
           </a:p>
           <a:p>
@@ -7524,7 +7424,7 @@
                 </a:solidFill>
                 <a:latin typeface="Consolas"/>
               </a:rPr>
-              <a:t>    &lt;h1&gt;My AI Companion&lt;/h1&gt;</a:t>
+              <a:t>  color: #1f2a37;</a:t>
             </a:r>
           </a:p>
           <a:p>
@@ -7549,7 +7449,7 @@
                 </a:solidFill>
                 <a:latin typeface="Consolas"/>
               </a:rPr>
-              <a:t>    &lt;p class="tag"&gt;Built by me, running on the school AI&lt;/p&gt;</a:t>
+              <a:t>}</a:t>
             </a:r>
           </a:p>
           <a:p>
@@ -7574,7 +7474,7 @@
                 </a:solidFill>
                 <a:latin typeface="Consolas"/>
               </a:rPr>
-              <a:t>    &lt;p class="caution"&gt;It can be confidently wrong. Check anything that matters.&lt;/p&gt;</a:t>
+              <a:t>.caution {</a:t>
             </a:r>
           </a:p>
         </p:txBody>
@@ -7607,7 +7507,7 @@
                   <a:srgbClr val="DCECEF"/>
                 </a:solidFill>
               </a:rPr>
-              <a:t>A caution line under the title: the AI can be confidently wrong. class="caution" styles it.</a:t>
+              <a:t>Style the caution line.</a:t>
             </a:r>
           </a:p>
         </p:txBody>
@@ -7666,7 +7566,7 @@
                   <a:srgbClr val="01AEFD"/>
                 </a:solidFill>
               </a:rPr>
-              <a:t>Type this into style.css   -   line 7</a:t>
+              <a:t>Type this into style.css   -   line 8</a:t>
             </a:r>
           </a:p>
         </p:txBody>
@@ -7860,11 +7760,36 @@
             <a:r>
               <a:rPr sz="1800">
                 <a:solidFill>
+                  <a:srgbClr val="6D8C97"/>
+                </a:solidFill>
+                <a:latin typeface="Consolas"/>
+              </a:rPr>
+              <a:t>.caution {</a:t>
+            </a:r>
+          </a:p>
+          <a:p>
+            <a:pPr>
+              <a:spcAft>
+                <a:spcPts val="0"/>
+              </a:spcAft>
+            </a:pPr>
+            <a:r>
+              <a:rPr sz="1800">
+                <a:solidFill>
+                  <a:srgbClr val="6D8C97"/>
+                </a:solidFill>
+                <a:latin typeface="Consolas"/>
+              </a:rPr>
+              <a:t>   8  </a:t>
+            </a:r>
+            <a:r>
+              <a:rPr sz="1800">
+                <a:solidFill>
                   <a:srgbClr val="7FE0A0"/>
                 </a:solidFill>
                 <a:latin typeface="Consolas"/>
               </a:rPr>
-              <a:t>.caution {</a:t>
+              <a:t>  margin: 0 0 18px;</a:t>
             </a:r>
           </a:p>
         </p:txBody>
@@ -7897,7 +7822,7 @@
                   <a:srgbClr val="DCECEF"/>
                 </a:solidFill>
               </a:rPr>
-              <a:t>Style the caution line.</a:t>
+              <a:t>Space around it.</a:t>
             </a:r>
           </a:p>
         </p:txBody>
@@ -7956,7 +7881,7 @@
                   <a:srgbClr val="01AEFD"/>
                 </a:solidFill>
               </a:rPr>
-              <a:t>Type this into style.css   -   line 8</a:t>
+              <a:t>Type this into style.css   -   line 9</a:t>
             </a:r>
           </a:p>
         </p:txBody>
@@ -8175,11 +8100,36 @@
             <a:r>
               <a:rPr sz="1800">
                 <a:solidFill>
+                  <a:srgbClr val="6D8C97"/>
+                </a:solidFill>
+                <a:latin typeface="Consolas"/>
+              </a:rPr>
+              <a:t>  margin: 0 0 18px;</a:t>
+            </a:r>
+          </a:p>
+          <a:p>
+            <a:pPr>
+              <a:spcAft>
+                <a:spcPts val="0"/>
+              </a:spcAft>
+            </a:pPr>
+            <a:r>
+              <a:rPr sz="1800">
+                <a:solidFill>
+                  <a:srgbClr val="6D8C97"/>
+                </a:solidFill>
+                <a:latin typeface="Consolas"/>
+              </a:rPr>
+              <a:t>   9  </a:t>
+            </a:r>
+            <a:r>
+              <a:rPr sz="1800">
+                <a:solidFill>
                   <a:srgbClr val="7FE0A0"/>
                 </a:solidFill>
                 <a:latin typeface="Consolas"/>
               </a:rPr>
-              <a:t>  margin: 0 0 18px;</a:t>
+              <a:t>  padding: 8px 11px;</a:t>
             </a:r>
           </a:p>
         </p:txBody>
@@ -8212,7 +8162,7 @@
                   <a:srgbClr val="DCECEF"/>
                 </a:solidFill>
               </a:rPr>
-              <a:t>Space around it.</a:t>
+              <a:t>Padding inside.</a:t>
             </a:r>
           </a:p>
         </p:txBody>
@@ -8228,346 +8178,6 @@
 <file path=ppt/slides/slide27.xml><?xml version="1.0" encoding="utf-8"?>
 <p:sld xmlns:a="http://schemas.openxmlformats.org/drawingml/2006/main" xmlns:p="http://schemas.openxmlformats.org/presentationml/2006/main" xmlns:r="http://schemas.openxmlformats.org/officeDocument/2006/relationships">
   <p:cSld>
-    <p:bg>
-      <p:bgPr>
-        <a:solidFill>
-          <a:srgbClr val="102127"/>
-        </a:solidFill>
-        <a:effectLst/>
-      </p:bgPr>
-    </p:bg>
-    <p:spTree>
-      <p:nvGrpSpPr>
-        <p:cNvPr id="1" name=""/>
-        <p:cNvGrpSpPr/>
-        <p:nvPr/>
-      </p:nvGrpSpPr>
-      <p:grpSpPr/>
-      <p:sp>
-        <p:nvSpPr>
-          <p:cNvPr id="2" name="TextBox 1"/>
-          <p:cNvSpPr txBox="1"/>
-          <p:nvPr/>
-        </p:nvSpPr>
-        <p:spPr>
-          <a:xfrm>
-            <a:off x="502920" y="274320"/>
-            <a:ext cx="11155680" cy="548640"/>
-          </a:xfrm>
-          <a:prstGeom prst="rect">
-            <a:avLst/>
-          </a:prstGeom>
-          <a:noFill/>
-        </p:spPr>
-        <p:txBody>
-          <a:bodyPr wrap="none">
-            <a:spAutoFit/>
-          </a:bodyPr>
-          <a:lstStyle/>
-          <a:p>
-            <a:r>
-              <a:rPr sz="2200" b="1">
-                <a:solidFill>
-                  <a:srgbClr val="01AEFD"/>
-                </a:solidFill>
-              </a:rPr>
-              <a:t>Type this into style.css   -   line 9</a:t>
-            </a:r>
-          </a:p>
-        </p:txBody>
-      </p:sp>
-      <p:sp>
-        <p:nvSpPr>
-          <p:cNvPr id="3" name="TextBox 2"/>
-          <p:cNvSpPr txBox="1"/>
-          <p:nvPr/>
-        </p:nvSpPr>
-        <p:spPr>
-          <a:xfrm>
-            <a:off x="502920" y="960120"/>
-            <a:ext cx="11155680" cy="4297680"/>
-          </a:xfrm>
-          <a:prstGeom prst="rect">
-            <a:avLst/>
-          </a:prstGeom>
-          <a:noFill/>
-        </p:spPr>
-        <p:txBody>
-          <a:bodyPr wrap="none">
-            <a:spAutoFit/>
-          </a:bodyPr>
-          <a:lstStyle/>
-          <a:p>
-            <a:pPr>
-              <a:spcAft>
-                <a:spcPts val="0"/>
-              </a:spcAft>
-            </a:pPr>
-            <a:r>
-              <a:rPr sz="1800">
-                <a:solidFill>
-                  <a:srgbClr val="6D8C97"/>
-                </a:solidFill>
-                <a:latin typeface="Consolas"/>
-              </a:rPr>
-              <a:t>   1  </a:t>
-            </a:r>
-            <a:r>
-              <a:rPr sz="1800">
-                <a:solidFill>
-                  <a:srgbClr val="6D8C97"/>
-                </a:solidFill>
-                <a:latin typeface="Consolas"/>
-              </a:rPr>
-              <a:t>body {</a:t>
-            </a:r>
-          </a:p>
-          <a:p>
-            <a:pPr>
-              <a:spcAft>
-                <a:spcPts val="0"/>
-              </a:spcAft>
-            </a:pPr>
-            <a:r>
-              <a:rPr sz="1800">
-                <a:solidFill>
-                  <a:srgbClr val="6D8C97"/>
-                </a:solidFill>
-                <a:latin typeface="Consolas"/>
-              </a:rPr>
-              <a:t>   2  </a:t>
-            </a:r>
-            <a:r>
-              <a:rPr sz="1800">
-                <a:solidFill>
-                  <a:srgbClr val="6D8C97"/>
-                </a:solidFill>
-                <a:latin typeface="Consolas"/>
-              </a:rPr>
-              <a:t>  margin: 0;</a:t>
-            </a:r>
-          </a:p>
-          <a:p>
-            <a:pPr>
-              <a:spcAft>
-                <a:spcPts val="0"/>
-              </a:spcAft>
-            </a:pPr>
-            <a:r>
-              <a:rPr sz="1800">
-                <a:solidFill>
-                  <a:srgbClr val="6D8C97"/>
-                </a:solidFill>
-                <a:latin typeface="Consolas"/>
-              </a:rPr>
-              <a:t>   3  </a:t>
-            </a:r>
-            <a:r>
-              <a:rPr sz="1800">
-                <a:solidFill>
-                  <a:srgbClr val="6D8C97"/>
-                </a:solidFill>
-                <a:latin typeface="Consolas"/>
-              </a:rPr>
-              <a:t>  font-family: Arial, Helvetica, sans-serif;</a:t>
-            </a:r>
-          </a:p>
-          <a:p>
-            <a:pPr>
-              <a:spcAft>
-                <a:spcPts val="0"/>
-              </a:spcAft>
-            </a:pPr>
-            <a:r>
-              <a:rPr sz="1800">
-                <a:solidFill>
-                  <a:srgbClr val="6D8C97"/>
-                </a:solidFill>
-                <a:latin typeface="Consolas"/>
-              </a:rPr>
-              <a:t>   4  </a:t>
-            </a:r>
-            <a:r>
-              <a:rPr sz="1800">
-                <a:solidFill>
-                  <a:srgbClr val="6D8C97"/>
-                </a:solidFill>
-                <a:latin typeface="Consolas"/>
-              </a:rPr>
-              <a:t>  background: #eef2f7;</a:t>
-            </a:r>
-          </a:p>
-          <a:p>
-            <a:pPr>
-              <a:spcAft>
-                <a:spcPts val="0"/>
-              </a:spcAft>
-            </a:pPr>
-            <a:r>
-              <a:rPr sz="1800">
-                <a:solidFill>
-                  <a:srgbClr val="6D8C97"/>
-                </a:solidFill>
-                <a:latin typeface="Consolas"/>
-              </a:rPr>
-              <a:t>   5  </a:t>
-            </a:r>
-            <a:r>
-              <a:rPr sz="1800">
-                <a:solidFill>
-                  <a:srgbClr val="6D8C97"/>
-                </a:solidFill>
-                <a:latin typeface="Consolas"/>
-              </a:rPr>
-              <a:t>  color: #1f2a37;</a:t>
-            </a:r>
-          </a:p>
-          <a:p>
-            <a:pPr>
-              <a:spcAft>
-                <a:spcPts val="0"/>
-              </a:spcAft>
-            </a:pPr>
-            <a:r>
-              <a:rPr sz="1800">
-                <a:solidFill>
-                  <a:srgbClr val="6D8C97"/>
-                </a:solidFill>
-                <a:latin typeface="Consolas"/>
-              </a:rPr>
-              <a:t>   6  </a:t>
-            </a:r>
-            <a:r>
-              <a:rPr sz="1800">
-                <a:solidFill>
-                  <a:srgbClr val="6D8C97"/>
-                </a:solidFill>
-                <a:latin typeface="Consolas"/>
-              </a:rPr>
-              <a:t>}</a:t>
-            </a:r>
-          </a:p>
-          <a:p>
-            <a:pPr>
-              <a:spcAft>
-                <a:spcPts val="0"/>
-              </a:spcAft>
-            </a:pPr>
-            <a:r>
-              <a:rPr sz="1800">
-                <a:solidFill>
-                  <a:srgbClr val="6D8C97"/>
-                </a:solidFill>
-                <a:latin typeface="Consolas"/>
-              </a:rPr>
-              <a:t>   7  </a:t>
-            </a:r>
-            <a:r>
-              <a:rPr sz="1800">
-                <a:solidFill>
-                  <a:srgbClr val="6D8C97"/>
-                </a:solidFill>
-                <a:latin typeface="Consolas"/>
-              </a:rPr>
-              <a:t>.caution {</a:t>
-            </a:r>
-          </a:p>
-          <a:p>
-            <a:pPr>
-              <a:spcAft>
-                <a:spcPts val="0"/>
-              </a:spcAft>
-            </a:pPr>
-            <a:r>
-              <a:rPr sz="1800">
-                <a:solidFill>
-                  <a:srgbClr val="6D8C97"/>
-                </a:solidFill>
-                <a:latin typeface="Consolas"/>
-              </a:rPr>
-              <a:t>   8  </a:t>
-            </a:r>
-            <a:r>
-              <a:rPr sz="1800">
-                <a:solidFill>
-                  <a:srgbClr val="6D8C97"/>
-                </a:solidFill>
-                <a:latin typeface="Consolas"/>
-              </a:rPr>
-              <a:t>  margin: 0 0 18px;</a:t>
-            </a:r>
-          </a:p>
-          <a:p>
-            <a:pPr>
-              <a:spcAft>
-                <a:spcPts val="0"/>
-              </a:spcAft>
-            </a:pPr>
-            <a:r>
-              <a:rPr sz="1800">
-                <a:solidFill>
-                  <a:srgbClr val="6D8C97"/>
-                </a:solidFill>
-                <a:latin typeface="Consolas"/>
-              </a:rPr>
-              <a:t>   9  </a:t>
-            </a:r>
-            <a:r>
-              <a:rPr sz="1800">
-                <a:solidFill>
-                  <a:srgbClr val="7FE0A0"/>
-                </a:solidFill>
-                <a:latin typeface="Consolas"/>
-              </a:rPr>
-              <a:t>  padding: 8px 11px;</a:t>
-            </a:r>
-          </a:p>
-        </p:txBody>
-      </p:sp>
-      <p:sp>
-        <p:nvSpPr>
-          <p:cNvPr id="4" name="TextBox 3"/>
-          <p:cNvSpPr txBox="1"/>
-          <p:nvPr/>
-        </p:nvSpPr>
-        <p:spPr>
-          <a:xfrm>
-            <a:off x="548640" y="5623560"/>
-            <a:ext cx="11064240" cy="1051560"/>
-          </a:xfrm>
-          <a:prstGeom prst="rect">
-            <a:avLst/>
-          </a:prstGeom>
-          <a:noFill/>
-        </p:spPr>
-        <p:txBody>
-          <a:bodyPr wrap="square">
-            <a:spAutoFit/>
-          </a:bodyPr>
-          <a:lstStyle/>
-          <a:p>
-            <a:r>
-              <a:rPr sz="2000">
-                <a:solidFill>
-                  <a:srgbClr val="DCECEF"/>
-                </a:solidFill>
-              </a:rPr>
-              <a:t>Padding inside.</a:t>
-            </a:r>
-          </a:p>
-        </p:txBody>
-      </p:sp>
-    </p:spTree>
-  </p:cSld>
-  <p:clrMapOvr>
-    <a:masterClrMapping/>
-  </p:clrMapOvr>
-</p:sld>
-</file>
-
-<file path=ppt/slides/slide28.xml><?xml version="1.0" encoding="utf-8"?>
-<p:sld xmlns:a="http://schemas.openxmlformats.org/drawingml/2006/main" xmlns:p="http://schemas.openxmlformats.org/presentationml/2006/main" xmlns:r="http://schemas.openxmlformats.org/officeDocument/2006/relationships">
-  <p:cSld>
     <p:spTree>
       <p:nvGrpSpPr>
         <p:cNvPr id="1" name=""/>
@@ -8725,7 +8335,7 @@
 </p:sld>
 </file>
 
-<file path=ppt/slides/slide29.xml><?xml version="1.0" encoding="utf-8"?>
+<file path=ppt/slides/slide28.xml><?xml version="1.0" encoding="utf-8"?>
 <p:sld xmlns:a="http://schemas.openxmlformats.org/drawingml/2006/main" xmlns:p="http://schemas.openxmlformats.org/presentationml/2006/main" xmlns:r="http://schemas.openxmlformats.org/officeDocument/2006/relationships">
   <p:cSld>
     <p:bg>
@@ -9422,6 +9032,371 @@
 </p:sld>
 </file>
 
+<file path=ppt/slides/slide29.xml><?xml version="1.0" encoding="utf-8"?>
+<p:sld xmlns:a="http://schemas.openxmlformats.org/drawingml/2006/main" xmlns:p="http://schemas.openxmlformats.org/presentationml/2006/main" xmlns:r="http://schemas.openxmlformats.org/officeDocument/2006/relationships">
+  <p:cSld>
+    <p:bg>
+      <p:bgPr>
+        <a:solidFill>
+          <a:srgbClr val="102127"/>
+        </a:solidFill>
+        <a:effectLst/>
+      </p:bgPr>
+    </p:bg>
+    <p:spTree>
+      <p:nvGrpSpPr>
+        <p:cNvPr id="1" name=""/>
+        <p:cNvGrpSpPr/>
+        <p:nvPr/>
+      </p:nvGrpSpPr>
+      <p:grpSpPr/>
+      <p:sp>
+        <p:nvSpPr>
+          <p:cNvPr id="2" name="TextBox 1"/>
+          <p:cNvSpPr txBox="1"/>
+          <p:nvPr/>
+        </p:nvSpPr>
+        <p:spPr>
+          <a:xfrm>
+            <a:off x="502920" y="274320"/>
+            <a:ext cx="11155680" cy="548640"/>
+          </a:xfrm>
+          <a:prstGeom prst="rect">
+            <a:avLst/>
+          </a:prstGeom>
+          <a:noFill/>
+        </p:spPr>
+        <p:txBody>
+          <a:bodyPr wrap="none">
+            <a:spAutoFit/>
+          </a:bodyPr>
+          <a:lstStyle/>
+          <a:p>
+            <a:r>
+              <a:rPr sz="2200" b="1">
+                <a:solidFill>
+                  <a:srgbClr val="01AEFD"/>
+                </a:solidFill>
+              </a:rPr>
+              <a:t>Type this into style.css   -   line 10</a:t>
+            </a:r>
+          </a:p>
+        </p:txBody>
+      </p:sp>
+      <p:sp>
+        <p:nvSpPr>
+          <p:cNvPr id="3" name="TextBox 2"/>
+          <p:cNvSpPr txBox="1"/>
+          <p:nvPr/>
+        </p:nvSpPr>
+        <p:spPr>
+          <a:xfrm>
+            <a:off x="502920" y="960120"/>
+            <a:ext cx="11155680" cy="4297680"/>
+          </a:xfrm>
+          <a:prstGeom prst="rect">
+            <a:avLst/>
+          </a:prstGeom>
+          <a:noFill/>
+        </p:spPr>
+        <p:txBody>
+          <a:bodyPr wrap="none">
+            <a:spAutoFit/>
+          </a:bodyPr>
+          <a:lstStyle/>
+          <a:p>
+            <a:pPr>
+              <a:spcAft>
+                <a:spcPts val="0"/>
+              </a:spcAft>
+            </a:pPr>
+            <a:r>
+              <a:rPr sz="1800">
+                <a:solidFill>
+                  <a:srgbClr val="6D8C97"/>
+                </a:solidFill>
+                <a:latin typeface="Consolas"/>
+              </a:rPr>
+              <a:t>   1  </a:t>
+            </a:r>
+            <a:r>
+              <a:rPr sz="1800">
+                <a:solidFill>
+                  <a:srgbClr val="6D8C97"/>
+                </a:solidFill>
+                <a:latin typeface="Consolas"/>
+              </a:rPr>
+              <a:t>body {</a:t>
+            </a:r>
+          </a:p>
+          <a:p>
+            <a:pPr>
+              <a:spcAft>
+                <a:spcPts val="0"/>
+              </a:spcAft>
+            </a:pPr>
+            <a:r>
+              <a:rPr sz="1800">
+                <a:solidFill>
+                  <a:srgbClr val="6D8C97"/>
+                </a:solidFill>
+                <a:latin typeface="Consolas"/>
+              </a:rPr>
+              <a:t>   2  </a:t>
+            </a:r>
+            <a:r>
+              <a:rPr sz="1800">
+                <a:solidFill>
+                  <a:srgbClr val="6D8C97"/>
+                </a:solidFill>
+                <a:latin typeface="Consolas"/>
+              </a:rPr>
+              <a:t>  margin: 0;</a:t>
+            </a:r>
+          </a:p>
+          <a:p>
+            <a:pPr>
+              <a:spcAft>
+                <a:spcPts val="0"/>
+              </a:spcAft>
+            </a:pPr>
+            <a:r>
+              <a:rPr sz="1800">
+                <a:solidFill>
+                  <a:srgbClr val="6D8C97"/>
+                </a:solidFill>
+                <a:latin typeface="Consolas"/>
+              </a:rPr>
+              <a:t>   3  </a:t>
+            </a:r>
+            <a:r>
+              <a:rPr sz="1800">
+                <a:solidFill>
+                  <a:srgbClr val="6D8C97"/>
+                </a:solidFill>
+                <a:latin typeface="Consolas"/>
+              </a:rPr>
+              <a:t>  font-family: Arial, Helvetica, sans-serif;</a:t>
+            </a:r>
+          </a:p>
+          <a:p>
+            <a:pPr>
+              <a:spcAft>
+                <a:spcPts val="0"/>
+              </a:spcAft>
+            </a:pPr>
+            <a:r>
+              <a:rPr sz="1800">
+                <a:solidFill>
+                  <a:srgbClr val="6D8C97"/>
+                </a:solidFill>
+                <a:latin typeface="Consolas"/>
+              </a:rPr>
+              <a:t>   4  </a:t>
+            </a:r>
+            <a:r>
+              <a:rPr sz="1800">
+                <a:solidFill>
+                  <a:srgbClr val="6D8C97"/>
+                </a:solidFill>
+                <a:latin typeface="Consolas"/>
+              </a:rPr>
+              <a:t>  background: #eef2f7;</a:t>
+            </a:r>
+          </a:p>
+          <a:p>
+            <a:pPr>
+              <a:spcAft>
+                <a:spcPts val="0"/>
+              </a:spcAft>
+            </a:pPr>
+            <a:r>
+              <a:rPr sz="1800">
+                <a:solidFill>
+                  <a:srgbClr val="6D8C97"/>
+                </a:solidFill>
+                <a:latin typeface="Consolas"/>
+              </a:rPr>
+              <a:t>   5  </a:t>
+            </a:r>
+            <a:r>
+              <a:rPr sz="1800">
+                <a:solidFill>
+                  <a:srgbClr val="6D8C97"/>
+                </a:solidFill>
+                <a:latin typeface="Consolas"/>
+              </a:rPr>
+              <a:t>  color: #1f2a37;</a:t>
+            </a:r>
+          </a:p>
+          <a:p>
+            <a:pPr>
+              <a:spcAft>
+                <a:spcPts val="0"/>
+              </a:spcAft>
+            </a:pPr>
+            <a:r>
+              <a:rPr sz="1800">
+                <a:solidFill>
+                  <a:srgbClr val="6D8C97"/>
+                </a:solidFill>
+                <a:latin typeface="Consolas"/>
+              </a:rPr>
+              <a:t>   6  </a:t>
+            </a:r>
+            <a:r>
+              <a:rPr sz="1800">
+                <a:solidFill>
+                  <a:srgbClr val="6D8C97"/>
+                </a:solidFill>
+                <a:latin typeface="Consolas"/>
+              </a:rPr>
+              <a:t>}</a:t>
+            </a:r>
+          </a:p>
+          <a:p>
+            <a:pPr>
+              <a:spcAft>
+                <a:spcPts val="0"/>
+              </a:spcAft>
+            </a:pPr>
+            <a:r>
+              <a:rPr sz="1800">
+                <a:solidFill>
+                  <a:srgbClr val="6D8C97"/>
+                </a:solidFill>
+                <a:latin typeface="Consolas"/>
+              </a:rPr>
+              <a:t>   7  </a:t>
+            </a:r>
+            <a:r>
+              <a:rPr sz="1800">
+                <a:solidFill>
+                  <a:srgbClr val="6D8C97"/>
+                </a:solidFill>
+                <a:latin typeface="Consolas"/>
+              </a:rPr>
+              <a:t>.caution {</a:t>
+            </a:r>
+          </a:p>
+          <a:p>
+            <a:pPr>
+              <a:spcAft>
+                <a:spcPts val="0"/>
+              </a:spcAft>
+            </a:pPr>
+            <a:r>
+              <a:rPr sz="1800">
+                <a:solidFill>
+                  <a:srgbClr val="6D8C97"/>
+                </a:solidFill>
+                <a:latin typeface="Consolas"/>
+              </a:rPr>
+              <a:t>   8  </a:t>
+            </a:r>
+            <a:r>
+              <a:rPr sz="1800">
+                <a:solidFill>
+                  <a:srgbClr val="6D8C97"/>
+                </a:solidFill>
+                <a:latin typeface="Consolas"/>
+              </a:rPr>
+              <a:t>  margin: 0 0 18px;</a:t>
+            </a:r>
+          </a:p>
+          <a:p>
+            <a:pPr>
+              <a:spcAft>
+                <a:spcPts val="0"/>
+              </a:spcAft>
+            </a:pPr>
+            <a:r>
+              <a:rPr sz="1800">
+                <a:solidFill>
+                  <a:srgbClr val="6D8C97"/>
+                </a:solidFill>
+                <a:latin typeface="Consolas"/>
+              </a:rPr>
+              <a:t>   9  </a:t>
+            </a:r>
+            <a:r>
+              <a:rPr sz="1800">
+                <a:solidFill>
+                  <a:srgbClr val="6D8C97"/>
+                </a:solidFill>
+                <a:latin typeface="Consolas"/>
+              </a:rPr>
+              <a:t>  padding: 8px 11px;</a:t>
+            </a:r>
+          </a:p>
+          <a:p>
+            <a:pPr>
+              <a:spcAft>
+                <a:spcPts val="0"/>
+              </a:spcAft>
+            </a:pPr>
+            <a:r>
+              <a:rPr sz="1800">
+                <a:solidFill>
+                  <a:srgbClr val="6D8C97"/>
+                </a:solidFill>
+                <a:latin typeface="Consolas"/>
+              </a:rPr>
+              <a:t>  10  </a:t>
+            </a:r>
+            <a:r>
+              <a:rPr sz="1800">
+                <a:solidFill>
+                  <a:srgbClr val="7FE0A0"/>
+                </a:solidFill>
+                <a:latin typeface="Consolas"/>
+              </a:rPr>
+              <a:t>  border-left: 3px solid #e9952a;</a:t>
+            </a:r>
+          </a:p>
+        </p:txBody>
+      </p:sp>
+      <p:sp>
+        <p:nvSpPr>
+          <p:cNvPr id="4" name="TextBox 3"/>
+          <p:cNvSpPr txBox="1"/>
+          <p:nvPr/>
+        </p:nvSpPr>
+        <p:spPr>
+          <a:xfrm>
+            <a:off x="548640" y="5623560"/>
+            <a:ext cx="11064240" cy="1051560"/>
+          </a:xfrm>
+          <a:prstGeom prst="rect">
+            <a:avLst/>
+          </a:prstGeom>
+          <a:noFill/>
+        </p:spPr>
+        <p:txBody>
+          <a:bodyPr wrap="square">
+            <a:spAutoFit/>
+          </a:bodyPr>
+          <a:lstStyle/>
+          <a:p>
+            <a:r>
+              <a:rPr sz="2000">
+                <a:solidFill>
+                  <a:srgbClr val="DCECEF"/>
+                </a:solidFill>
+              </a:rPr>
+              <a:t>A coloured stripe down the LEFT edge - the warning accent.</a:t>
+            </a:r>
+          </a:p>
+        </p:txBody>
+      </p:sp>
+    </p:spTree>
+  </p:cSld>
+  <p:clrMapOvr>
+    <a:masterClrMapping/>
+  </p:clrMapOvr>
+</p:sld>
+</file>
+
 <file path=ppt/slides/slide3.xml><?xml version="1.0" encoding="utf-8"?>
 <p:sld xmlns:a="http://schemas.openxmlformats.org/drawingml/2006/main" xmlns:p="http://schemas.openxmlformats.org/presentationml/2006/main" xmlns:r="http://schemas.openxmlformats.org/officeDocument/2006/relationships">
   <p:cSld>
@@ -9595,7 +9570,7 @@
                   <a:srgbClr val="01AEFD"/>
                 </a:solidFill>
               </a:rPr>
-              <a:t>Type this into style.css   -   line 10</a:t>
+              <a:t>Type this into style.css   -   line 11</a:t>
             </a:r>
           </a:p>
         </p:txBody>
@@ -9628,7 +9603,7 @@
               </a:spcAft>
             </a:pPr>
             <a:r>
-              <a:rPr sz="1800">
+              <a:rPr sz="1300">
                 <a:solidFill>
                   <a:srgbClr val="6D8C97"/>
                 </a:solidFill>
@@ -9637,7 +9612,7 @@
               <a:t>   1  </a:t>
             </a:r>
             <a:r>
-              <a:rPr sz="1800">
+              <a:rPr sz="1300">
                 <a:solidFill>
                   <a:srgbClr val="6D8C97"/>
                 </a:solidFill>
@@ -9653,7 +9628,7 @@
               </a:spcAft>
             </a:pPr>
             <a:r>
-              <a:rPr sz="1800">
+              <a:rPr sz="1300">
                 <a:solidFill>
                   <a:srgbClr val="6D8C97"/>
                 </a:solidFill>
@@ -9662,7 +9637,7 @@
               <a:t>   2  </a:t>
             </a:r>
             <a:r>
-              <a:rPr sz="1800">
+              <a:rPr sz="1300">
                 <a:solidFill>
                   <a:srgbClr val="6D8C97"/>
                 </a:solidFill>
@@ -9678,7 +9653,7 @@
               </a:spcAft>
             </a:pPr>
             <a:r>
-              <a:rPr sz="1800">
+              <a:rPr sz="1300">
                 <a:solidFill>
                   <a:srgbClr val="6D8C97"/>
                 </a:solidFill>
@@ -9687,7 +9662,7 @@
               <a:t>   3  </a:t>
             </a:r>
             <a:r>
-              <a:rPr sz="1800">
+              <a:rPr sz="1300">
                 <a:solidFill>
                   <a:srgbClr val="6D8C97"/>
                 </a:solidFill>
@@ -9703,7 +9678,7 @@
               </a:spcAft>
             </a:pPr>
             <a:r>
-              <a:rPr sz="1800">
+              <a:rPr sz="1300">
                 <a:solidFill>
                   <a:srgbClr val="6D8C97"/>
                 </a:solidFill>
@@ -9712,7 +9687,7 @@
               <a:t>   4  </a:t>
             </a:r>
             <a:r>
-              <a:rPr sz="1800">
+              <a:rPr sz="1300">
                 <a:solidFill>
                   <a:srgbClr val="6D8C97"/>
                 </a:solidFill>
@@ -9728,7 +9703,7 @@
               </a:spcAft>
             </a:pPr>
             <a:r>
-              <a:rPr sz="1800">
+              <a:rPr sz="1300">
                 <a:solidFill>
                   <a:srgbClr val="6D8C97"/>
                 </a:solidFill>
@@ -9737,7 +9712,7 @@
               <a:t>   5  </a:t>
             </a:r>
             <a:r>
-              <a:rPr sz="1800">
+              <a:rPr sz="1300">
                 <a:solidFill>
                   <a:srgbClr val="6D8C97"/>
                 </a:solidFill>
@@ -9753,7 +9728,7 @@
               </a:spcAft>
             </a:pPr>
             <a:r>
-              <a:rPr sz="1800">
+              <a:rPr sz="1300">
                 <a:solidFill>
                   <a:srgbClr val="6D8C97"/>
                 </a:solidFill>
@@ -9762,7 +9737,7 @@
               <a:t>   6  </a:t>
             </a:r>
             <a:r>
-              <a:rPr sz="1800">
+              <a:rPr sz="1300">
                 <a:solidFill>
                   <a:srgbClr val="6D8C97"/>
                 </a:solidFill>
@@ -9778,7 +9753,7 @@
               </a:spcAft>
             </a:pPr>
             <a:r>
-              <a:rPr sz="1800">
+              <a:rPr sz="1300">
                 <a:solidFill>
                   <a:srgbClr val="6D8C97"/>
                 </a:solidFill>
@@ -9787,7 +9762,7 @@
               <a:t>   7  </a:t>
             </a:r>
             <a:r>
-              <a:rPr sz="1800">
+              <a:rPr sz="1300">
                 <a:solidFill>
                   <a:srgbClr val="6D8C97"/>
                 </a:solidFill>
@@ -9803,7 +9778,7 @@
               </a:spcAft>
             </a:pPr>
             <a:r>
-              <a:rPr sz="1800">
+              <a:rPr sz="1300">
                 <a:solidFill>
                   <a:srgbClr val="6D8C97"/>
                 </a:solidFill>
@@ -9812,7 +9787,7 @@
               <a:t>   8  </a:t>
             </a:r>
             <a:r>
-              <a:rPr sz="1800">
+              <a:rPr sz="1300">
                 <a:solidFill>
                   <a:srgbClr val="6D8C97"/>
                 </a:solidFill>
@@ -9828,7 +9803,7 @@
               </a:spcAft>
             </a:pPr>
             <a:r>
-              <a:rPr sz="1800">
+              <a:rPr sz="1300">
                 <a:solidFill>
                   <a:srgbClr val="6D8C97"/>
                 </a:solidFill>
@@ -9837,7 +9812,7 @@
               <a:t>   9  </a:t>
             </a:r>
             <a:r>
-              <a:rPr sz="1800">
+              <a:rPr sz="1300">
                 <a:solidFill>
                   <a:srgbClr val="6D8C97"/>
                 </a:solidFill>
@@ -9853,7 +9828,7 @@
               </a:spcAft>
             </a:pPr>
             <a:r>
-              <a:rPr sz="1800">
+              <a:rPr sz="1300">
                 <a:solidFill>
                   <a:srgbClr val="6D8C97"/>
                 </a:solidFill>
@@ -9862,13 +9837,38 @@
               <a:t>  10  </a:t>
             </a:r>
             <a:r>
-              <a:rPr sz="1800">
+              <a:rPr sz="1300">
+                <a:solidFill>
+                  <a:srgbClr val="6D8C97"/>
+                </a:solidFill>
+                <a:latin typeface="Consolas"/>
+              </a:rPr>
+              <a:t>  border-left: 3px solid #e9952a;</a:t>
+            </a:r>
+          </a:p>
+          <a:p>
+            <a:pPr>
+              <a:spcAft>
+                <a:spcPts val="0"/>
+              </a:spcAft>
+            </a:pPr>
+            <a:r>
+              <a:rPr sz="1300">
+                <a:solidFill>
+                  <a:srgbClr val="6D8C97"/>
+                </a:solidFill>
+                <a:latin typeface="Consolas"/>
+              </a:rPr>
+              <a:t>  11  </a:t>
+            </a:r>
+            <a:r>
+              <a:rPr sz="1300">
                 <a:solidFill>
                   <a:srgbClr val="7FE0A0"/>
                 </a:solidFill>
                 <a:latin typeface="Consolas"/>
               </a:rPr>
-              <a:t>  border-left: 3px solid #e9952a;</a:t>
+              <a:t>  background: #fff8e9;</a:t>
             </a:r>
           </a:p>
         </p:txBody>
@@ -9901,7 +9901,7 @@
                   <a:srgbClr val="DCECEF"/>
                 </a:solidFill>
               </a:rPr>
-              <a:t>A coloured stripe down the LEFT edge - the warning accent.</a:t>
+              <a:t>A soft warning-yellow background.</a:t>
             </a:r>
           </a:p>
         </p:txBody>
@@ -9960,7 +9960,7 @@
                   <a:srgbClr val="01AEFD"/>
                 </a:solidFill>
               </a:rPr>
-              <a:t>Type this into style.css   -   line 11</a:t>
+              <a:t>Type this into style.css   -   line 12</a:t>
             </a:r>
           </a:p>
         </p:txBody>
@@ -10254,11 +10254,36 @@
             <a:r>
               <a:rPr sz="1300">
                 <a:solidFill>
+                  <a:srgbClr val="6D8C97"/>
+                </a:solidFill>
+                <a:latin typeface="Consolas"/>
+              </a:rPr>
+              <a:t>  background: #fff8e9;</a:t>
+            </a:r>
+          </a:p>
+          <a:p>
+            <a:pPr>
+              <a:spcAft>
+                <a:spcPts val="0"/>
+              </a:spcAft>
+            </a:pPr>
+            <a:r>
+              <a:rPr sz="1300">
+                <a:solidFill>
+                  <a:srgbClr val="6D8C97"/>
+                </a:solidFill>
+                <a:latin typeface="Consolas"/>
+              </a:rPr>
+              <a:t>  12  </a:t>
+            </a:r>
+            <a:r>
+              <a:rPr sz="1300">
+                <a:solidFill>
                   <a:srgbClr val="7FE0A0"/>
                 </a:solidFill>
                 <a:latin typeface="Consolas"/>
               </a:rPr>
-              <a:t>  background: #fff8e9;</a:t>
+              <a:t>  color: #8a5a12;</a:t>
             </a:r>
           </a:p>
         </p:txBody>
@@ -10291,7 +10316,7 @@
                   <a:srgbClr val="DCECEF"/>
                 </a:solidFill>
               </a:rPr>
-              <a:t>A soft warning-yellow background.</a:t>
+              <a:t>Brown text to match.</a:t>
             </a:r>
           </a:p>
         </p:txBody>
@@ -10350,7 +10375,7 @@
                   <a:srgbClr val="01AEFD"/>
                 </a:solidFill>
               </a:rPr>
-              <a:t>Type this into style.css   -   line 12</a:t>
+              <a:t>Type this into style.css   -   line 13</a:t>
             </a:r>
           </a:p>
         </p:txBody>
@@ -10669,11 +10694,36 @@
             <a:r>
               <a:rPr sz="1300">
                 <a:solidFill>
+                  <a:srgbClr val="6D8C97"/>
+                </a:solidFill>
+                <a:latin typeface="Consolas"/>
+              </a:rPr>
+              <a:t>  color: #8a5a12;</a:t>
+            </a:r>
+          </a:p>
+          <a:p>
+            <a:pPr>
+              <a:spcAft>
+                <a:spcPts val="0"/>
+              </a:spcAft>
+            </a:pPr>
+            <a:r>
+              <a:rPr sz="1300">
+                <a:solidFill>
+                  <a:srgbClr val="6D8C97"/>
+                </a:solidFill>
+                <a:latin typeface="Consolas"/>
+              </a:rPr>
+              <a:t>  13  </a:t>
+            </a:r>
+            <a:r>
+              <a:rPr sz="1300">
+                <a:solidFill>
                   <a:srgbClr val="7FE0A0"/>
                 </a:solidFill>
                 <a:latin typeface="Consolas"/>
               </a:rPr>
-              <a:t>  color: #8a5a12;</a:t>
+              <a:t>  font-size: 13px;</a:t>
             </a:r>
           </a:p>
         </p:txBody>
@@ -10706,7 +10756,7 @@
                   <a:srgbClr val="DCECEF"/>
                 </a:solidFill>
               </a:rPr>
-              <a:t>Brown text to match.</a:t>
+              <a:t>Small - it is a note, not a headline.</a:t>
             </a:r>
           </a:p>
         </p:txBody>
@@ -10765,7 +10815,7 @@
                   <a:srgbClr val="01AEFD"/>
                 </a:solidFill>
               </a:rPr>
-              <a:t>Type this into style.css   -   line 13</a:t>
+              <a:t>All together in style.css</a:t>
             </a:r>
           </a:p>
         </p:txBody>
@@ -10809,7 +10859,7 @@
             <a:r>
               <a:rPr sz="1300">
                 <a:solidFill>
-                  <a:srgbClr val="6D8C97"/>
+                  <a:srgbClr val="7FE0A0"/>
                 </a:solidFill>
                 <a:latin typeface="Consolas"/>
               </a:rPr>
@@ -10834,7 +10884,7 @@
             <a:r>
               <a:rPr sz="1300">
                 <a:solidFill>
-                  <a:srgbClr val="6D8C97"/>
+                  <a:srgbClr val="7FE0A0"/>
                 </a:solidFill>
                 <a:latin typeface="Consolas"/>
               </a:rPr>
@@ -10859,7 +10909,7 @@
             <a:r>
               <a:rPr sz="1300">
                 <a:solidFill>
-                  <a:srgbClr val="6D8C97"/>
+                  <a:srgbClr val="7FE0A0"/>
                 </a:solidFill>
                 <a:latin typeface="Consolas"/>
               </a:rPr>
@@ -10884,7 +10934,7 @@
             <a:r>
               <a:rPr sz="1300">
                 <a:solidFill>
-                  <a:srgbClr val="6D8C97"/>
+                  <a:srgbClr val="7FE0A0"/>
                 </a:solidFill>
                 <a:latin typeface="Consolas"/>
               </a:rPr>
@@ -10909,7 +10959,7 @@
             <a:r>
               <a:rPr sz="1300">
                 <a:solidFill>
-                  <a:srgbClr val="6D8C97"/>
+                  <a:srgbClr val="7FE0A0"/>
                 </a:solidFill>
                 <a:latin typeface="Consolas"/>
               </a:rPr>
@@ -10934,7 +10984,7 @@
             <a:r>
               <a:rPr sz="1300">
                 <a:solidFill>
-                  <a:srgbClr val="6D8C97"/>
+                  <a:srgbClr val="7FE0A0"/>
                 </a:solidFill>
                 <a:latin typeface="Consolas"/>
               </a:rPr>
@@ -10959,7 +11009,7 @@
             <a:r>
               <a:rPr sz="1300">
                 <a:solidFill>
-                  <a:srgbClr val="6D8C97"/>
+                  <a:srgbClr val="7FE0A0"/>
                 </a:solidFill>
                 <a:latin typeface="Consolas"/>
               </a:rPr>
@@ -10984,7 +11034,7 @@
             <a:r>
               <a:rPr sz="1300">
                 <a:solidFill>
-                  <a:srgbClr val="6D8C97"/>
+                  <a:srgbClr val="7FE0A0"/>
                 </a:solidFill>
                 <a:latin typeface="Consolas"/>
               </a:rPr>
@@ -11009,7 +11059,7 @@
             <a:r>
               <a:rPr sz="1300">
                 <a:solidFill>
-                  <a:srgbClr val="6D8C97"/>
+                  <a:srgbClr val="7FE0A0"/>
                 </a:solidFill>
                 <a:latin typeface="Consolas"/>
               </a:rPr>
@@ -11034,7 +11084,7 @@
             <a:r>
               <a:rPr sz="1300">
                 <a:solidFill>
-                  <a:srgbClr val="6D8C97"/>
+                  <a:srgbClr val="7FE0A0"/>
                 </a:solidFill>
                 <a:latin typeface="Consolas"/>
               </a:rPr>
@@ -11059,7 +11109,7 @@
             <a:r>
               <a:rPr sz="1300">
                 <a:solidFill>
-                  <a:srgbClr val="6D8C97"/>
+                  <a:srgbClr val="7FE0A0"/>
                 </a:solidFill>
                 <a:latin typeface="Consolas"/>
               </a:rPr>
@@ -11084,7 +11134,7 @@
             <a:r>
               <a:rPr sz="1300">
                 <a:solidFill>
-                  <a:srgbClr val="6D8C97"/>
+                  <a:srgbClr val="7FE0A0"/>
                 </a:solidFill>
                 <a:latin typeface="Consolas"/>
               </a:rPr>
@@ -11114,6 +11164,31 @@
                 <a:latin typeface="Consolas"/>
               </a:rPr>
               <a:t>  font-size: 13px;</a:t>
+            </a:r>
+          </a:p>
+          <a:p>
+            <a:pPr>
+              <a:spcAft>
+                <a:spcPts val="0"/>
+              </a:spcAft>
+            </a:pPr>
+            <a:r>
+              <a:rPr sz="1300">
+                <a:solidFill>
+                  <a:srgbClr val="6D8C97"/>
+                </a:solidFill>
+                <a:latin typeface="Consolas"/>
+              </a:rPr>
+              <a:t>  14  </a:t>
+            </a:r>
+            <a:r>
+              <a:rPr sz="1300">
+                <a:solidFill>
+                  <a:srgbClr val="7FE0A0"/>
+                </a:solidFill>
+                <a:latin typeface="Consolas"/>
+              </a:rPr>
+              <a:t>}</a:t>
             </a:r>
           </a:p>
         </p:txBody>
@@ -11146,7 +11221,7 @@
                   <a:srgbClr val="DCECEF"/>
                 </a:solidFill>
               </a:rPr>
-              <a:t>Small - it is a note, not a headline.</a:t>
+              <a:t>That is the whole piece. Check yours looks the same before moving on.</a:t>
             </a:r>
           </a:p>
         </p:txBody>
@@ -11162,14 +11237,6 @@
 <file path=ppt/slides/slide34.xml><?xml version="1.0" encoding="utf-8"?>
 <p:sld xmlns:a="http://schemas.openxmlformats.org/drawingml/2006/main" xmlns:p="http://schemas.openxmlformats.org/presentationml/2006/main" xmlns:r="http://schemas.openxmlformats.org/officeDocument/2006/relationships">
   <p:cSld>
-    <p:bg>
-      <p:bgPr>
-        <a:solidFill>
-          <a:srgbClr val="102127"/>
-        </a:solidFill>
-        <a:effectLst/>
-      </p:bgPr>
-    </p:bg>
     <p:spTree>
       <p:nvGrpSpPr>
         <p:cNvPr id="1" name=""/>
@@ -11179,14 +11246,40 @@
       <p:grpSpPr/>
       <p:sp>
         <p:nvSpPr>
-          <p:cNvPr id="2" name="TextBox 1"/>
+          <p:cNvPr id="2" name="Title 1"/>
+          <p:cNvSpPr>
+            <a:spLocks noGrp="1"/>
+          </p:cNvSpPr>
+          <p:nvPr>
+            <p:ph type="title"/>
+          </p:nvPr>
+        </p:nvSpPr>
+        <p:spPr/>
+        <p:txBody>
+          <a:bodyPr/>
+          <a:lstStyle/>
+          <a:p>
+            <a:r>
+              <a:rPr sz="3800" b="1">
+                <a:solidFill>
+                  <a:srgbClr val="1F2A37"/>
+                </a:solidFill>
+              </a:rPr>
+              <a:t>Checkpoint: it guards itself</a:t>
+            </a:r>
+          </a:p>
+        </p:txBody>
+      </p:sp>
+      <p:sp>
+        <p:nvSpPr>
+          <p:cNvPr id="3" name="TextBox 2"/>
           <p:cNvSpPr txBox="1"/>
           <p:nvPr/>
         </p:nvSpPr>
         <p:spPr>
           <a:xfrm>
-            <a:off x="502920" y="274320"/>
-            <a:ext cx="11155680" cy="548640"/>
+            <a:off x="868680" y="502920"/>
+            <a:ext cx="5486400" cy="457200"/>
           </a:xfrm>
           <a:prstGeom prst="rect">
             <a:avLst/>
@@ -11200,26 +11293,26 @@
           <a:lstStyle/>
           <a:p>
             <a:r>
-              <a:rPr sz="2200" b="1">
+              <a:rPr sz="1500" b="1">
                 <a:solidFill>
                   <a:srgbClr val="01AEFD"/>
                 </a:solidFill>
               </a:rPr>
-              <a:t>All together in style.css</a:t>
-            </a:r>
-          </a:p>
-        </p:txBody>
-      </p:sp>
-      <p:sp>
-        <p:nvSpPr>
-          <p:cNvPr id="3" name="TextBox 2"/>
+              <a:t>CHECKPOINT - RUN IT</a:t>
+            </a:r>
+          </a:p>
+        </p:txBody>
+      </p:sp>
+      <p:sp>
+        <p:nvSpPr>
+          <p:cNvPr id="4" name="TextBox 3"/>
           <p:cNvSpPr txBox="1"/>
           <p:nvPr/>
         </p:nvSpPr>
         <p:spPr>
           <a:xfrm>
-            <a:off x="502920" y="960120"/>
-            <a:ext cx="11155680" cy="4297680"/>
+            <a:off x="822960" y="1828800"/>
+            <a:ext cx="10515600" cy="4206240"/>
           </a:xfrm>
           <a:prstGeom prst="rect">
             <a:avLst/>
@@ -11227,391 +11320,53 @@
           <a:noFill/>
         </p:spPr>
         <p:txBody>
-          <a:bodyPr wrap="none">
-            <a:spAutoFit/>
-          </a:bodyPr>
-          <a:lstStyle/>
-          <a:p>
-            <a:pPr>
-              <a:spcAft>
-                <a:spcPts val="0"/>
-              </a:spcAft>
-            </a:pPr>
-            <a:r>
-              <a:rPr sz="1300">
-                <a:solidFill>
-                  <a:srgbClr val="6D8C97"/>
-                </a:solidFill>
-                <a:latin typeface="Consolas"/>
-              </a:rPr>
-              <a:t>   1  </a:t>
-            </a:r>
-            <a:r>
-              <a:rPr sz="1300">
-                <a:solidFill>
-                  <a:srgbClr val="7FE0A0"/>
-                </a:solidFill>
-                <a:latin typeface="Consolas"/>
-              </a:rPr>
-              <a:t>body {</a:t>
-            </a:r>
-          </a:p>
-          <a:p>
-            <a:pPr>
-              <a:spcAft>
-                <a:spcPts val="0"/>
-              </a:spcAft>
-            </a:pPr>
-            <a:r>
-              <a:rPr sz="1300">
-                <a:solidFill>
-                  <a:srgbClr val="6D8C97"/>
-                </a:solidFill>
-                <a:latin typeface="Consolas"/>
-              </a:rPr>
-              <a:t>   2  </a:t>
-            </a:r>
-            <a:r>
-              <a:rPr sz="1300">
-                <a:solidFill>
-                  <a:srgbClr val="7FE0A0"/>
-                </a:solidFill>
-                <a:latin typeface="Consolas"/>
-              </a:rPr>
-              <a:t>  margin: 0;</a:t>
-            </a:r>
-          </a:p>
-          <a:p>
-            <a:pPr>
-              <a:spcAft>
-                <a:spcPts val="0"/>
-              </a:spcAft>
-            </a:pPr>
-            <a:r>
-              <a:rPr sz="1300">
-                <a:solidFill>
-                  <a:srgbClr val="6D8C97"/>
-                </a:solidFill>
-                <a:latin typeface="Consolas"/>
-              </a:rPr>
-              <a:t>   3  </a:t>
-            </a:r>
-            <a:r>
-              <a:rPr sz="1300">
-                <a:solidFill>
-                  <a:srgbClr val="7FE0A0"/>
-                </a:solidFill>
-                <a:latin typeface="Consolas"/>
-              </a:rPr>
-              <a:t>  font-family: Arial, Helvetica, sans-serif;</a:t>
-            </a:r>
-          </a:p>
-          <a:p>
-            <a:pPr>
-              <a:spcAft>
-                <a:spcPts val="0"/>
-              </a:spcAft>
-            </a:pPr>
-            <a:r>
-              <a:rPr sz="1300">
-                <a:solidFill>
-                  <a:srgbClr val="6D8C97"/>
-                </a:solidFill>
-                <a:latin typeface="Consolas"/>
-              </a:rPr>
-              <a:t>   4  </a:t>
-            </a:r>
-            <a:r>
-              <a:rPr sz="1300">
-                <a:solidFill>
-                  <a:srgbClr val="7FE0A0"/>
-                </a:solidFill>
-                <a:latin typeface="Consolas"/>
-              </a:rPr>
-              <a:t>  background: #eef2f7;</a:t>
-            </a:r>
-          </a:p>
-          <a:p>
-            <a:pPr>
-              <a:spcAft>
-                <a:spcPts val="0"/>
-              </a:spcAft>
-            </a:pPr>
-            <a:r>
-              <a:rPr sz="1300">
-                <a:solidFill>
-                  <a:srgbClr val="6D8C97"/>
-                </a:solidFill>
-                <a:latin typeface="Consolas"/>
-              </a:rPr>
-              <a:t>   5  </a:t>
-            </a:r>
-            <a:r>
-              <a:rPr sz="1300">
-                <a:solidFill>
-                  <a:srgbClr val="7FE0A0"/>
-                </a:solidFill>
-                <a:latin typeface="Consolas"/>
-              </a:rPr>
-              <a:t>  color: #1f2a37;</a:t>
-            </a:r>
-          </a:p>
-          <a:p>
-            <a:pPr>
-              <a:spcAft>
-                <a:spcPts val="0"/>
-              </a:spcAft>
-            </a:pPr>
-            <a:r>
-              <a:rPr sz="1300">
-                <a:solidFill>
-                  <a:srgbClr val="6D8C97"/>
-                </a:solidFill>
-                <a:latin typeface="Consolas"/>
-              </a:rPr>
-              <a:t>   6  </a:t>
-            </a:r>
-            <a:r>
-              <a:rPr sz="1300">
-                <a:solidFill>
-                  <a:srgbClr val="7FE0A0"/>
-                </a:solidFill>
-                <a:latin typeface="Consolas"/>
-              </a:rPr>
-              <a:t>}</a:t>
-            </a:r>
-          </a:p>
-          <a:p>
-            <a:pPr>
-              <a:spcAft>
-                <a:spcPts val="0"/>
-              </a:spcAft>
-            </a:pPr>
-            <a:r>
-              <a:rPr sz="1300">
-                <a:solidFill>
-                  <a:srgbClr val="6D8C97"/>
-                </a:solidFill>
-                <a:latin typeface="Consolas"/>
-              </a:rPr>
-              <a:t>   7  </a:t>
-            </a:r>
-            <a:r>
-              <a:rPr sz="1300">
-                <a:solidFill>
-                  <a:srgbClr val="7FE0A0"/>
-                </a:solidFill>
-                <a:latin typeface="Consolas"/>
-              </a:rPr>
-              <a:t>.caution {</a:t>
-            </a:r>
-          </a:p>
-          <a:p>
-            <a:pPr>
-              <a:spcAft>
-                <a:spcPts val="0"/>
-              </a:spcAft>
-            </a:pPr>
-            <a:r>
-              <a:rPr sz="1300">
-                <a:solidFill>
-                  <a:srgbClr val="6D8C97"/>
-                </a:solidFill>
-                <a:latin typeface="Consolas"/>
-              </a:rPr>
-              <a:t>   8  </a:t>
-            </a:r>
-            <a:r>
-              <a:rPr sz="1300">
-                <a:solidFill>
-                  <a:srgbClr val="7FE0A0"/>
-                </a:solidFill>
-                <a:latin typeface="Consolas"/>
-              </a:rPr>
-              <a:t>  margin: 0 0 18px;</a:t>
-            </a:r>
-          </a:p>
-          <a:p>
-            <a:pPr>
-              <a:spcAft>
-                <a:spcPts val="0"/>
-              </a:spcAft>
-            </a:pPr>
-            <a:r>
-              <a:rPr sz="1300">
-                <a:solidFill>
-                  <a:srgbClr val="6D8C97"/>
-                </a:solidFill>
-                <a:latin typeface="Consolas"/>
-              </a:rPr>
-              <a:t>   9  </a:t>
-            </a:r>
-            <a:r>
-              <a:rPr sz="1300">
-                <a:solidFill>
-                  <a:srgbClr val="7FE0A0"/>
-                </a:solidFill>
-                <a:latin typeface="Consolas"/>
-              </a:rPr>
-              <a:t>  padding: 8px 11px;</a:t>
-            </a:r>
-          </a:p>
-          <a:p>
-            <a:pPr>
-              <a:spcAft>
-                <a:spcPts val="0"/>
-              </a:spcAft>
-            </a:pPr>
-            <a:r>
-              <a:rPr sz="1300">
-                <a:solidFill>
-                  <a:srgbClr val="6D8C97"/>
-                </a:solidFill>
-                <a:latin typeface="Consolas"/>
-              </a:rPr>
-              <a:t>  10  </a:t>
-            </a:r>
-            <a:r>
-              <a:rPr sz="1300">
-                <a:solidFill>
-                  <a:srgbClr val="7FE0A0"/>
-                </a:solidFill>
-                <a:latin typeface="Consolas"/>
-              </a:rPr>
-              <a:t>  border-left: 3px solid #e9952a;</a:t>
-            </a:r>
-          </a:p>
-          <a:p>
-            <a:pPr>
-              <a:spcAft>
-                <a:spcPts val="0"/>
-              </a:spcAft>
-            </a:pPr>
-            <a:r>
-              <a:rPr sz="1300">
-                <a:solidFill>
-                  <a:srgbClr val="6D8C97"/>
-                </a:solidFill>
-                <a:latin typeface="Consolas"/>
-              </a:rPr>
-              <a:t>  11  </a:t>
-            </a:r>
-            <a:r>
-              <a:rPr sz="1300">
-                <a:solidFill>
-                  <a:srgbClr val="7FE0A0"/>
-                </a:solidFill>
-                <a:latin typeface="Consolas"/>
-              </a:rPr>
-              <a:t>  background: #fff8e9;</a:t>
-            </a:r>
-          </a:p>
-          <a:p>
-            <a:pPr>
-              <a:spcAft>
-                <a:spcPts val="0"/>
-              </a:spcAft>
-            </a:pPr>
-            <a:r>
-              <a:rPr sz="1300">
-                <a:solidFill>
-                  <a:srgbClr val="6D8C97"/>
-                </a:solidFill>
-                <a:latin typeface="Consolas"/>
-              </a:rPr>
-              <a:t>  12  </a:t>
-            </a:r>
-            <a:r>
-              <a:rPr sz="1300">
-                <a:solidFill>
-                  <a:srgbClr val="7FE0A0"/>
-                </a:solidFill>
-                <a:latin typeface="Consolas"/>
-              </a:rPr>
-              <a:t>  color: #8a5a12;</a:t>
-            </a:r>
-          </a:p>
-          <a:p>
-            <a:pPr>
-              <a:spcAft>
-                <a:spcPts val="0"/>
-              </a:spcAft>
-            </a:pPr>
-            <a:r>
-              <a:rPr sz="1300">
-                <a:solidFill>
-                  <a:srgbClr val="6D8C97"/>
-                </a:solidFill>
-                <a:latin typeface="Consolas"/>
-              </a:rPr>
-              <a:t>  13  </a:t>
-            </a:r>
-            <a:r>
-              <a:rPr sz="1300">
-                <a:solidFill>
-                  <a:srgbClr val="7FE0A0"/>
-                </a:solidFill>
-                <a:latin typeface="Consolas"/>
-              </a:rPr>
-              <a:t>  font-size: 13px;</a:t>
-            </a:r>
-          </a:p>
-          <a:p>
-            <a:pPr>
-              <a:spcAft>
-                <a:spcPts val="0"/>
-              </a:spcAft>
-            </a:pPr>
-            <a:r>
-              <a:rPr sz="1300">
-                <a:solidFill>
-                  <a:srgbClr val="6D8C97"/>
-                </a:solidFill>
-                <a:latin typeface="Consolas"/>
-              </a:rPr>
-              <a:t>  14  </a:t>
-            </a:r>
-            <a:r>
-              <a:rPr sz="1300">
-                <a:solidFill>
-                  <a:srgbClr val="7FE0A0"/>
-                </a:solidFill>
-                <a:latin typeface="Consolas"/>
-              </a:rPr>
-              <a:t>}</a:t>
-            </a:r>
-          </a:p>
-        </p:txBody>
-      </p:sp>
-      <p:sp>
-        <p:nvSpPr>
-          <p:cNvPr id="4" name="TextBox 3"/>
-          <p:cNvSpPr txBox="1"/>
-          <p:nvPr/>
-        </p:nvSpPr>
-        <p:spPr>
-          <a:xfrm>
-            <a:off x="548640" y="5623560"/>
-            <a:ext cx="11064240" cy="1051560"/>
-          </a:xfrm>
-          <a:prstGeom prst="rect">
-            <a:avLst/>
-          </a:prstGeom>
-          <a:noFill/>
-        </p:spPr>
-        <p:txBody>
           <a:bodyPr wrap="square">
             <a:spAutoFit/>
           </a:bodyPr>
           <a:lstStyle/>
           <a:p>
-            <a:r>
-              <a:rPr sz="2000">
-                <a:solidFill>
-                  <a:srgbClr val="DCECEF"/>
-                </a:solidFill>
-              </a:rPr>
-              <a:t>That is the whole piece. Check yours looks the same before moving on.</a:t>
+            <a:pPr>
+              <a:spcAft>
+                <a:spcPts val="1400"/>
+              </a:spcAft>
+            </a:pPr>
+            <a:r>
+              <a:rPr sz="2800">
+                <a:solidFill>
+                  <a:srgbClr val="01AEFD"/>
+                </a:solidFill>
+              </a:rPr>
+              <a:t>Press Run. Send an empty message (nothing happens), then paste a huge block over 500 characters - you should get 'That is too long...' instead of a wasted request. And read the caution line under the title: even a confident answer can be wrong.</a:t>
+            </a:r>
+          </a:p>
+          <a:p>
+            <a:pPr>
+              <a:spcAft>
+                <a:spcPts val="1400"/>
+              </a:spcAft>
+            </a:pPr>
+            <a:r>
+              <a:rPr sz="2400">
+                <a:solidFill>
+                  <a:srgbClr val="1F2A37"/>
+                </a:solidFill>
+              </a:rPr>
+              <a:t>• Run it in the classroom, or press Show the output in the web deck.</a:t>
+            </a:r>
+          </a:p>
+          <a:p>
+            <a:pPr>
+              <a:spcAft>
+                <a:spcPts val="1400"/>
+              </a:spcAft>
+            </a:pPr>
+            <a:r>
+              <a:rPr sz="2400">
+                <a:solidFill>
+                  <a:srgbClr val="1F2A37"/>
+                </a:solidFill>
+              </a:rPr>
+              <a:t>• Everyone's screen should match this.</a:t>
             </a:r>
           </a:p>
         </p:txBody>
@@ -12021,7 +11776,7 @@
                   <a:srgbClr val="1F2A37"/>
                 </a:solidFill>
               </a:rPr>
-              <a:t>Checkpoint: it guards itself</a:t>
+              <a:t>Neither defence is perfect</a:t>
             </a:r>
           </a:p>
         </p:txBody>
@@ -12029,39 +11784,6 @@
       <p:sp>
         <p:nvSpPr>
           <p:cNvPr id="3" name="TextBox 2"/>
-          <p:cNvSpPr txBox="1"/>
-          <p:nvPr/>
-        </p:nvSpPr>
-        <p:spPr>
-          <a:xfrm>
-            <a:off x="868680" y="502920"/>
-            <a:ext cx="5486400" cy="457200"/>
-          </a:xfrm>
-          <a:prstGeom prst="rect">
-            <a:avLst/>
-          </a:prstGeom>
-          <a:noFill/>
-        </p:spPr>
-        <p:txBody>
-          <a:bodyPr wrap="none">
-            <a:spAutoFit/>
-          </a:bodyPr>
-          <a:lstStyle/>
-          <a:p>
-            <a:r>
-              <a:rPr sz="1500" b="1">
-                <a:solidFill>
-                  <a:srgbClr val="01AEFD"/>
-                </a:solidFill>
-              </a:rPr>
-              <a:t>CHECKPOINT - RUN IT</a:t>
-            </a:r>
-          </a:p>
-        </p:txBody>
-      </p:sp>
-      <p:sp>
-        <p:nvSpPr>
-          <p:cNvPr id="4" name="TextBox 3"/>
           <p:cNvSpPr txBox="1"/>
           <p:nvPr/>
         </p:nvSpPr>
@@ -12087,12 +11809,12 @@
               </a:spcAft>
             </a:pPr>
             <a:r>
-              <a:rPr sz="2800">
-                <a:solidFill>
-                  <a:srgbClr val="01AEFD"/>
-                </a:solidFill>
-              </a:rPr>
-              <a:t>Press Run. Send an empty message (nothing happens), then paste a huge block over 500 characters - you should get 'That is too long...' instead of a wasted request. And read the caution line under the title: even a confident answer can be wrong.</a:t>
+              <a:rPr sz="2400">
+                <a:solidFill>
+                  <a:srgbClr val="1F2A37"/>
+                </a:solidFill>
+              </a:rPr>
+              <a:t>• Rules in the persona - can be talked around</a:t>
             </a:r>
           </a:p>
           <a:p>
@@ -12107,7 +11829,7 @@
                   <a:srgbClr val="1F2A37"/>
                 </a:solidFill>
               </a:rPr>
-              <a:t>• Run it in the classroom, or press Show the output in the web deck.</a:t>
+              <a:t>• Guards in code - blunt</a:t>
             </a:r>
           </a:p>
           <a:p>
@@ -12122,7 +11844,7 @@
                   <a:srgbClr val="1F2A37"/>
                 </a:solidFill>
               </a:rPr>
-              <a:t>• Everyone's screen should match this.</a:t>
+              <a:t>• So never let it decide anything alone</a:t>
             </a:r>
           </a:p>
         </p:txBody>
@@ -12138,6 +11860,14 @@
 <file path=ppt/slides/slide8.xml><?xml version="1.0" encoding="utf-8"?>
 <p:sld xmlns:a="http://schemas.openxmlformats.org/drawingml/2006/main" xmlns:p="http://schemas.openxmlformats.org/presentationml/2006/main" xmlns:r="http://schemas.openxmlformats.org/officeDocument/2006/relationships">
   <p:cSld>
+    <p:bg>
+      <p:bgPr>
+        <a:solidFill>
+          <a:srgbClr val="102127"/>
+        </a:solidFill>
+        <a:effectLst/>
+      </p:bgPr>
+    </p:bg>
     <p:spTree>
       <p:nvGrpSpPr>
         <p:cNvPr id="1" name=""/>
@@ -12147,40 +11877,14 @@
       <p:grpSpPr/>
       <p:sp>
         <p:nvSpPr>
-          <p:cNvPr id="2" name="Title 1"/>
-          <p:cNvSpPr>
-            <a:spLocks noGrp="1"/>
-          </p:cNvSpPr>
-          <p:nvPr>
-            <p:ph type="title"/>
-          </p:nvPr>
-        </p:nvSpPr>
-        <p:spPr/>
-        <p:txBody>
-          <a:bodyPr/>
-          <a:lstStyle/>
-          <a:p>
-            <a:r>
-              <a:rPr sz="3800" b="1">
-                <a:solidFill>
-                  <a:srgbClr val="1F2A37"/>
-                </a:solidFill>
-              </a:rPr>
-              <a:t>Neither defence is perfect</a:t>
-            </a:r>
-          </a:p>
-        </p:txBody>
-      </p:sp>
-      <p:sp>
-        <p:nvSpPr>
-          <p:cNvPr id="3" name="TextBox 2"/>
+          <p:cNvPr id="2" name="TextBox 1"/>
           <p:cNvSpPr txBox="1"/>
           <p:nvPr/>
         </p:nvSpPr>
         <p:spPr>
           <a:xfrm>
-            <a:off x="822960" y="1828800"/>
-            <a:ext cx="10515600" cy="4206240"/>
+            <a:off x="502920" y="274320"/>
+            <a:ext cx="11155680" cy="548640"/>
           </a:xfrm>
           <a:prstGeom prst="rect">
             <a:avLst/>
@@ -12188,53 +11892,324 @@
           <a:noFill/>
         </p:spPr>
         <p:txBody>
+          <a:bodyPr wrap="none">
+            <a:spAutoFit/>
+          </a:bodyPr>
+          <a:lstStyle/>
+          <a:p>
+            <a:r>
+              <a:rPr sz="2200" b="1">
+                <a:solidFill>
+                  <a:srgbClr val="01AEFD"/>
+                </a:solidFill>
+              </a:rPr>
+              <a:t>Type this into script.js   -   line 188</a:t>
+            </a:r>
+          </a:p>
+        </p:txBody>
+      </p:sp>
+      <p:sp>
+        <p:nvSpPr>
+          <p:cNvPr id="3" name="TextBox 2"/>
+          <p:cNvSpPr txBox="1"/>
+          <p:nvPr/>
+        </p:nvSpPr>
+        <p:spPr>
+          <a:xfrm>
+            <a:off x="502920" y="960120"/>
+            <a:ext cx="11155680" cy="4297680"/>
+          </a:xfrm>
+          <a:prstGeom prst="rect">
+            <a:avLst/>
+          </a:prstGeom>
+          <a:noFill/>
+        </p:spPr>
+        <p:txBody>
+          <a:bodyPr wrap="none">
+            <a:spAutoFit/>
+          </a:bodyPr>
+          <a:lstStyle/>
+          <a:p>
+            <a:pPr>
+              <a:spcAft>
+                <a:spcPts val="0"/>
+              </a:spcAft>
+            </a:pPr>
+            <a:r>
+              <a:rPr sz="1800">
+                <a:solidFill>
+                  <a:srgbClr val="6D8C97"/>
+                </a:solidFill>
+                <a:latin typeface="Consolas"/>
+              </a:rPr>
+              <a:t> 179  </a:t>
+            </a:r>
+            <a:r>
+              <a:rPr sz="1800">
+                <a:solidFill>
+                  <a:srgbClr val="6D8C97"/>
+                </a:solidFill>
+                <a:latin typeface="Consolas"/>
+              </a:rPr>
+              <a:t> </a:t>
+            </a:r>
+          </a:p>
+          <a:p>
+            <a:pPr>
+              <a:spcAft>
+                <a:spcPts val="0"/>
+              </a:spcAft>
+            </a:pPr>
+            <a:r>
+              <a:rPr sz="1800">
+                <a:solidFill>
+                  <a:srgbClr val="6D8C97"/>
+                </a:solidFill>
+                <a:latin typeface="Consolas"/>
+              </a:rPr>
+              <a:t> 180  </a:t>
+            </a:r>
+            <a:r>
+              <a:rPr sz="1800">
+                <a:solidFill>
+                  <a:srgbClr val="6D8C97"/>
+                </a:solidFill>
+                <a:latin typeface="Consolas"/>
+              </a:rPr>
+              <a:t>// The browser calls this when the form is submitted.</a:t>
+            </a:r>
+          </a:p>
+          <a:p>
+            <a:pPr>
+              <a:spcAft>
+                <a:spcPts val="0"/>
+              </a:spcAft>
+            </a:pPr>
+            <a:r>
+              <a:rPr sz="1800">
+                <a:solidFill>
+                  <a:srgbClr val="6D8C97"/>
+                </a:solidFill>
+                <a:latin typeface="Consolas"/>
+              </a:rPr>
+              <a:t> 181  </a:t>
+            </a:r>
+            <a:r>
+              <a:rPr sz="1800">
+                <a:solidFill>
+                  <a:srgbClr val="6D8C97"/>
+                </a:solidFill>
+                <a:latin typeface="Consolas"/>
+              </a:rPr>
+              <a:t>composer.addEventListener('submit', async function (event) {</a:t>
+            </a:r>
+          </a:p>
+          <a:p>
+            <a:pPr>
+              <a:spcAft>
+                <a:spcPts val="0"/>
+              </a:spcAft>
+            </a:pPr>
+            <a:r>
+              <a:rPr sz="1800">
+                <a:solidFill>
+                  <a:srgbClr val="6D8C97"/>
+                </a:solidFill>
+                <a:latin typeface="Consolas"/>
+              </a:rPr>
+              <a:t> 182  </a:t>
+            </a:r>
+            <a:r>
+              <a:rPr sz="1800">
+                <a:solidFill>
+                  <a:srgbClr val="6D8C97"/>
+                </a:solidFill>
+                <a:latin typeface="Consolas"/>
+              </a:rPr>
+              <a:t>  event.preventDefault();</a:t>
+            </a:r>
+          </a:p>
+          <a:p>
+            <a:pPr>
+              <a:spcAft>
+                <a:spcPts val="0"/>
+              </a:spcAft>
+            </a:pPr>
+            <a:r>
+              <a:rPr sz="1800">
+                <a:solidFill>
+                  <a:srgbClr val="6D8C97"/>
+                </a:solidFill>
+                <a:latin typeface="Consolas"/>
+              </a:rPr>
+              <a:t> 183  </a:t>
+            </a:r>
+            <a:r>
+              <a:rPr sz="1800">
+                <a:solidFill>
+                  <a:srgbClr val="6D8C97"/>
+                </a:solidFill>
+                <a:latin typeface="Consolas"/>
+              </a:rPr>
+              <a:t>  const text = promptBox.value.trim();</a:t>
+            </a:r>
+          </a:p>
+          <a:p>
+            <a:pPr>
+              <a:spcAft>
+                <a:spcPts val="0"/>
+              </a:spcAft>
+            </a:pPr>
+            <a:r>
+              <a:rPr sz="1800">
+                <a:solidFill>
+                  <a:srgbClr val="6D8C97"/>
+                </a:solidFill>
+                <a:latin typeface="Consolas"/>
+              </a:rPr>
+              <a:t> 184  </a:t>
+            </a:r>
+            <a:r>
+              <a:rPr sz="1800">
+                <a:solidFill>
+                  <a:srgbClr val="6D8C97"/>
+                </a:solidFill>
+                <a:latin typeface="Consolas"/>
+              </a:rPr>
+              <a:t>  if (text === '') { return; }</a:t>
+            </a:r>
+          </a:p>
+          <a:p>
+            <a:pPr>
+              <a:spcAft>
+                <a:spcPts val="0"/>
+              </a:spcAft>
+            </a:pPr>
+            <a:r>
+              <a:rPr sz="1800">
+                <a:solidFill>
+                  <a:srgbClr val="6D8C97"/>
+                </a:solidFill>
+                <a:latin typeface="Consolas"/>
+              </a:rPr>
+              <a:t> 185  </a:t>
+            </a:r>
+            <a:r>
+              <a:rPr sz="1800">
+                <a:solidFill>
+                  <a:srgbClr val="6D8C97"/>
+                </a:solidFill>
+                <a:latin typeface="Consolas"/>
+              </a:rPr>
+              <a:t> </a:t>
+            </a:r>
+          </a:p>
+          <a:p>
+            <a:pPr>
+              <a:spcAft>
+                <a:spcPts val="0"/>
+              </a:spcAft>
+            </a:pPr>
+            <a:r>
+              <a:rPr sz="1800">
+                <a:solidFill>
+                  <a:srgbClr val="6D8C97"/>
+                </a:solidFill>
+                <a:latin typeface="Consolas"/>
+              </a:rPr>
+              <a:t> 186  </a:t>
+            </a:r>
+            <a:r>
+              <a:rPr sz="1800">
+                <a:solidFill>
+                  <a:srgbClr val="6D8C97"/>
+                </a:solidFill>
+                <a:latin typeface="Consolas"/>
+              </a:rPr>
+              <a:t>  // Week 14: never trust what a user types. A giant message wastes the</a:t>
+            </a:r>
+          </a:p>
+          <a:p>
+            <a:pPr>
+              <a:spcAft>
+                <a:spcPts val="0"/>
+              </a:spcAft>
+            </a:pPr>
+            <a:r>
+              <a:rPr sz="1800">
+                <a:solidFill>
+                  <a:srgbClr val="6D8C97"/>
+                </a:solidFill>
+                <a:latin typeface="Consolas"/>
+              </a:rPr>
+              <a:t> 187  </a:t>
+            </a:r>
+            <a:r>
+              <a:rPr sz="1800">
+                <a:solidFill>
+                  <a:srgbClr val="6D8C97"/>
+                </a:solidFill>
+                <a:latin typeface="Consolas"/>
+              </a:rPr>
+              <a:t>  // whole conversation budget and gets the request refused for everyone.</a:t>
+            </a:r>
+          </a:p>
+          <a:p>
+            <a:pPr>
+              <a:spcAft>
+                <a:spcPts val="0"/>
+              </a:spcAft>
+            </a:pPr>
+            <a:r>
+              <a:rPr sz="1800">
+                <a:solidFill>
+                  <a:srgbClr val="6D8C97"/>
+                </a:solidFill>
+                <a:latin typeface="Consolas"/>
+              </a:rPr>
+              <a:t> 188  </a:t>
+            </a:r>
+            <a:r>
+              <a:rPr sz="1800">
+                <a:solidFill>
+                  <a:srgbClr val="7FE0A0"/>
+                </a:solidFill>
+                <a:latin typeface="Consolas"/>
+              </a:rPr>
+              <a:t>  if (text.length &gt; 500) {</a:t>
+            </a:r>
+          </a:p>
+        </p:txBody>
+      </p:sp>
+      <p:sp>
+        <p:nvSpPr>
+          <p:cNvPr id="4" name="TextBox 3"/>
+          <p:cNvSpPr txBox="1"/>
+          <p:nvPr/>
+        </p:nvSpPr>
+        <p:spPr>
+          <a:xfrm>
+            <a:off x="548640" y="5623560"/>
+            <a:ext cx="11064240" cy="1051560"/>
+          </a:xfrm>
+          <a:prstGeom prst="rect">
+            <a:avLst/>
+          </a:prstGeom>
+          <a:noFill/>
+        </p:spPr>
+        <p:txBody>
           <a:bodyPr wrap="square">
             <a:spAutoFit/>
           </a:bodyPr>
           <a:lstStyle/>
           <a:p>
-            <a:pPr>
-              <a:spcAft>
-                <a:spcPts val="1400"/>
-              </a:spcAft>
-            </a:pPr>
-            <a:r>
-              <a:rPr sz="2400">
-                <a:solidFill>
-                  <a:srgbClr val="1F2A37"/>
-                </a:solidFill>
-              </a:rPr>
-              <a:t>• Rules in the persona - can be talked around</a:t>
-            </a:r>
-          </a:p>
-          <a:p>
-            <a:pPr>
-              <a:spcAft>
-                <a:spcPts val="1400"/>
-              </a:spcAft>
-            </a:pPr>
-            <a:r>
-              <a:rPr sz="2400">
-                <a:solidFill>
-                  <a:srgbClr val="1F2A37"/>
-                </a:solidFill>
-              </a:rPr>
-              <a:t>• Guards in code - blunt</a:t>
-            </a:r>
-          </a:p>
-          <a:p>
-            <a:pPr>
-              <a:spcAft>
-                <a:spcPts val="1400"/>
-              </a:spcAft>
-            </a:pPr>
-            <a:r>
-              <a:rPr sz="2400">
-                <a:solidFill>
-                  <a:srgbClr val="1F2A37"/>
-                </a:solidFill>
-              </a:rPr>
-              <a:t>• So never let it decide anything alone</a:t>
+            <a:r>
+              <a:rPr sz="2000">
+                <a:solidFill>
+                  <a:srgbClr val="DCECEF"/>
+                </a:solidFill>
+              </a:rPr>
+              <a:t>Week 14: guard against a giant message. .length is the character count.</a:t>
             </a:r>
           </a:p>
         </p:txBody>
@@ -12293,7 +12268,7 @@
                   <a:srgbClr val="01AEFD"/>
                 </a:solidFill>
               </a:rPr>
-              <a:t>Type this into script.js   -   line 188</a:t>
+              <a:t>Type this into script.js   -   line 189</a:t>
             </a:r>
           </a:p>
         </p:txBody>
@@ -12326,7 +12301,7 @@
               </a:spcAft>
             </a:pPr>
             <a:r>
-              <a:rPr sz="1800">
+              <a:rPr sz="1300">
                 <a:solidFill>
                   <a:srgbClr val="6D8C97"/>
                 </a:solidFill>
@@ -12335,7 +12310,7 @@
               <a:t> 179  </a:t>
             </a:r>
             <a:r>
-              <a:rPr sz="1800">
+              <a:rPr sz="1300">
                 <a:solidFill>
                   <a:srgbClr val="6D8C97"/>
                 </a:solidFill>
@@ -12351,7 +12326,7 @@
               </a:spcAft>
             </a:pPr>
             <a:r>
-              <a:rPr sz="1800">
+              <a:rPr sz="1300">
                 <a:solidFill>
                   <a:srgbClr val="6D8C97"/>
                 </a:solidFill>
@@ -12360,7 +12335,7 @@
               <a:t> 180  </a:t>
             </a:r>
             <a:r>
-              <a:rPr sz="1800">
+              <a:rPr sz="1300">
                 <a:solidFill>
                   <a:srgbClr val="6D8C97"/>
                 </a:solidFill>
@@ -12376,7 +12351,7 @@
               </a:spcAft>
             </a:pPr>
             <a:r>
-              <a:rPr sz="1800">
+              <a:rPr sz="1300">
                 <a:solidFill>
                   <a:srgbClr val="6D8C97"/>
                 </a:solidFill>
@@ -12385,7 +12360,7 @@
               <a:t> 181  </a:t>
             </a:r>
             <a:r>
-              <a:rPr sz="1800">
+              <a:rPr sz="1300">
                 <a:solidFill>
                   <a:srgbClr val="6D8C97"/>
                 </a:solidFill>
@@ -12401,7 +12376,7 @@
               </a:spcAft>
             </a:pPr>
             <a:r>
-              <a:rPr sz="1800">
+              <a:rPr sz="1300">
                 <a:solidFill>
                   <a:srgbClr val="6D8C97"/>
                 </a:solidFill>
@@ -12410,7 +12385,7 @@
               <a:t> 182  </a:t>
             </a:r>
             <a:r>
-              <a:rPr sz="1800">
+              <a:rPr sz="1300">
                 <a:solidFill>
                   <a:srgbClr val="6D8C97"/>
                 </a:solidFill>
@@ -12426,7 +12401,7 @@
               </a:spcAft>
             </a:pPr>
             <a:r>
-              <a:rPr sz="1800">
+              <a:rPr sz="1300">
                 <a:solidFill>
                   <a:srgbClr val="6D8C97"/>
                 </a:solidFill>
@@ -12435,7 +12410,7 @@
               <a:t> 183  </a:t>
             </a:r>
             <a:r>
-              <a:rPr sz="1800">
+              <a:rPr sz="1300">
                 <a:solidFill>
                   <a:srgbClr val="6D8C97"/>
                 </a:solidFill>
@@ -12451,7 +12426,7 @@
               </a:spcAft>
             </a:pPr>
             <a:r>
-              <a:rPr sz="1800">
+              <a:rPr sz="1300">
                 <a:solidFill>
                   <a:srgbClr val="6D8C97"/>
                 </a:solidFill>
@@ -12460,7 +12435,7 @@
               <a:t> 184  </a:t>
             </a:r>
             <a:r>
-              <a:rPr sz="1800">
+              <a:rPr sz="1300">
                 <a:solidFill>
                   <a:srgbClr val="6D8C97"/>
                 </a:solidFill>
@@ -12476,7 +12451,7 @@
               </a:spcAft>
             </a:pPr>
             <a:r>
-              <a:rPr sz="1800">
+              <a:rPr sz="1300">
                 <a:solidFill>
                   <a:srgbClr val="6D8C97"/>
                 </a:solidFill>
@@ -12485,7 +12460,7 @@
               <a:t> 185  </a:t>
             </a:r>
             <a:r>
-              <a:rPr sz="1800">
+              <a:rPr sz="1300">
                 <a:solidFill>
                   <a:srgbClr val="6D8C97"/>
                 </a:solidFill>
@@ -12501,7 +12476,7 @@
               </a:spcAft>
             </a:pPr>
             <a:r>
-              <a:rPr sz="1800">
+              <a:rPr sz="1300">
                 <a:solidFill>
                   <a:srgbClr val="6D8C97"/>
                 </a:solidFill>
@@ -12510,7 +12485,7 @@
               <a:t> 186  </a:t>
             </a:r>
             <a:r>
-              <a:rPr sz="1800">
+              <a:rPr sz="1300">
                 <a:solidFill>
                   <a:srgbClr val="6D8C97"/>
                 </a:solidFill>
@@ -12526,7 +12501,7 @@
               </a:spcAft>
             </a:pPr>
             <a:r>
-              <a:rPr sz="1800">
+              <a:rPr sz="1300">
                 <a:solidFill>
                   <a:srgbClr val="6D8C97"/>
                 </a:solidFill>
@@ -12535,7 +12510,7 @@
               <a:t> 187  </a:t>
             </a:r>
             <a:r>
-              <a:rPr sz="1800">
+              <a:rPr sz="1300">
                 <a:solidFill>
                   <a:srgbClr val="6D8C97"/>
                 </a:solidFill>
@@ -12551,7 +12526,7 @@
               </a:spcAft>
             </a:pPr>
             <a:r>
-              <a:rPr sz="1800">
+              <a:rPr sz="1300">
                 <a:solidFill>
                   <a:srgbClr val="6D8C97"/>
                 </a:solidFill>
@@ -12560,13 +12535,38 @@
               <a:t> 188  </a:t>
             </a:r>
             <a:r>
-              <a:rPr sz="1800">
+              <a:rPr sz="1300">
+                <a:solidFill>
+                  <a:srgbClr val="6D8C97"/>
+                </a:solidFill>
+                <a:latin typeface="Consolas"/>
+              </a:rPr>
+              <a:t>  if (text.length &gt; 500) {</a:t>
+            </a:r>
+          </a:p>
+          <a:p>
+            <a:pPr>
+              <a:spcAft>
+                <a:spcPts val="0"/>
+              </a:spcAft>
+            </a:pPr>
+            <a:r>
+              <a:rPr sz="1300">
+                <a:solidFill>
+                  <a:srgbClr val="6D8C97"/>
+                </a:solidFill>
+                <a:latin typeface="Consolas"/>
+              </a:rPr>
+              <a:t> 189  </a:t>
+            </a:r>
+            <a:r>
+              <a:rPr sz="1300">
                 <a:solidFill>
                   <a:srgbClr val="7FE0A0"/>
                 </a:solidFill>
                 <a:latin typeface="Consolas"/>
               </a:rPr>
-              <a:t>  if (text.length &gt; 500) {</a:t>
+              <a:t>    addLine('problem', 'That is too long for one message - try under 500 characters.');</a:t>
             </a:r>
           </a:p>
         </p:txBody>
@@ -12599,7 +12599,7 @@
                   <a:srgbClr val="DCECEF"/>
                 </a:solidFill>
               </a:rPr>
-              <a:t>Week 14: guard against a giant message. .length is the character count.</a:t>
+              <a:t>Tell them kindly it is too long.</a:t>
             </a:r>
           </a:p>
         </p:txBody>
